--- a/HHHD様_PoC検証_Phase2_第1回週次進捗報告_20261007.pptx
+++ b/HHHD様_PoC検証_Phase2_第1回週次進捗報告_20261007.pptx
@@ -248,7 +248,7 @@
               <a:lstStyle/>
               <a:p>
                 <a:pPr>
-                  <a:defRPr sz="1100" b="1">
+                  <a:defRPr sz="1100" b="1" lang="ja-JP" altLang="en-US">
                     <a:solidFill>
                       <a:srgbClr val="FFFFFF"/>
                     </a:solidFill>
@@ -330,7 +330,7 @@
               <a:lstStyle/>
               <a:p>
                 <a:pPr>
-                  <a:defRPr sz="1100" b="1">
+                  <a:defRPr sz="1100" b="1" lang="ja-JP" altLang="en-US">
                     <a:solidFill>
                       <a:srgbClr val="262626"/>
                     </a:solidFill>
@@ -412,7 +412,7 @@
               <a:lstStyle/>
               <a:p>
                 <a:pPr>
-                  <a:defRPr sz="1100" b="1">
+                  <a:defRPr sz="1100" b="1" lang="ja-JP" altLang="en-US">
                     <a:solidFill>
                       <a:srgbClr val="262626"/>
                     </a:solidFill>
@@ -492,7 +492,7 @@
           <a:lstStyle/>
           <a:p>
             <a:pPr>
-              <a:defRPr sz="1100">
+              <a:defRPr sz="1100" lang="ja-JP" altLang="en-US">
                 <a:solidFill>
                   <a:srgbClr val="262626"/>
                 </a:solidFill>
@@ -530,7 +530,7 @@
         <a:lstStyle/>
         <a:p>
           <a:pPr>
-            <a:defRPr sz="1050"/>
+            <a:defRPr sz="1050" lang="ja-JP" altLang="en-US"/>
           </a:pPr>
         </a:p>
       </c:txPr>
@@ -542,13 +542,13 @@
     <a:lstStyle/>
     <a:p>
       <a:pPr>
-        <a:defRPr sz="1100">
+        <a:defRPr sz="1100" lang="ja-JP" altLang="en-US">
           <a:solidFill>
             <a:srgbClr val="262626"/>
           </a:solidFill>
         </a:defRPr>
       </a:pPr>
-      <a:endParaRPr lang="en-US"/>
+      <a:endParaRPr lang="ja-JP" altLang="en-US"/>
     </a:p>
   </c:txPr>
   <c:externalData r:id="rId1">
@@ -1193,7 +1193,7 @@
               <a:buFontTx/>
               <a:buNone/>
               <a:tabLst/>
-              <a:defRPr/>
+              <a:defRPr lang="ja-JP" altLang="en-US"/>
             </a:pPr>
             <a:fld id="{6588B299-FBEB-47AA-8879-672851374028}" type="slidenum">
               <a:rPr kumimoji="0" lang="ja-JP" altLang="en-US" sz="1200" b="0" i="0" u="none" strike="noStrike" kern="1200" cap="none" spc="0" normalizeH="0" baseline="0" noProof="0">
@@ -1226,11 +1226,11 @@
                 <a:buFontTx/>
                 <a:buNone/>
                 <a:tabLst/>
-                <a:defRPr/>
+                <a:defRPr lang="ja-JP" altLang="en-US"/>
               </a:pPr>
               <a:t>1</a:t>
             </a:fld>
-            <a:endParaRPr kumimoji="0" lang="en-US" altLang="ja-JP" sz="1200" b="0" i="0" u="none" strike="noStrike" kern="1200" cap="none" spc="0" normalizeH="0" baseline="0" noProof="0">
+            <a:endParaRPr kumimoji="0" lang="ja-JP" altLang="en-US" sz="1200" b="0" i="0" u="none" strike="noStrike" kern="1200" cap="none" spc="0" normalizeH="0" baseline="0" noProof="0">
               <a:ln>
                 <a:noFill/>
               </a:ln>
@@ -2227,7 +2227,7 @@
               <a:buFontTx/>
               <a:buNone/>
               <a:tabLst/>
-              <a:defRPr/>
+              <a:defRPr lang="ja-JP" altLang="en-US"/>
             </a:pPr>
             <a:fld id="{86A06DAD-44D3-4EA7-8DE4-9E33DC7017BE}" type="slidenum">
               <a:rPr kumimoji="0" lang="ja-JP" altLang="en-US" sz="1200" b="0" i="0" u="none" strike="noStrike" kern="1200" cap="none" spc="0" normalizeH="0" baseline="0" noProof="0" smtClean="0">
@@ -2260,7 +2260,7 @@
                 <a:buFontTx/>
                 <a:buNone/>
                 <a:tabLst/>
-                <a:defRPr/>
+                <a:defRPr lang="ja-JP" altLang="en-US"/>
               </a:pPr>
               <a:t>14</a:t>
             </a:fld>
@@ -33375,7 +33375,7 @@
               <a:buNone/>
             </a:pPr>
             <a:r>
-              <a:rPr sz="1700" b="1">
+              <a:rPr sz="1700" b="1" lang="ja-JP" altLang="en-US">
                 <a:solidFill>
                   <a:srgbClr val="FFFFFF"/>
                 </a:solidFill>
@@ -33411,7 +33411,7 @@
               <a:buNone/>
             </a:pPr>
             <a:r>
-              <a:rPr sz="1600" b="1">
+              <a:rPr sz="1600" b="1" lang="ja-JP" altLang="en-US">
                 <a:solidFill>
                   <a:srgbClr val="FFFFFF"/>
                 </a:solidFill>
@@ -33447,7 +33447,7 @@
               <a:buNone/>
             </a:pPr>
             <a:r>
-              <a:rPr sz="1700" b="0">
+              <a:rPr sz="1700" b="0" lang="ja-JP" altLang="en-US">
                 <a:solidFill>
                   <a:srgbClr val="262626"/>
                 </a:solidFill>
@@ -33483,7 +33483,7 @@
               <a:buNone/>
             </a:pPr>
             <a:r>
-              <a:rPr sz="1600" b="0">
+              <a:rPr sz="1600" b="0" lang="ja-JP" altLang="en-US">
                 <a:solidFill>
                   <a:srgbClr val="262626"/>
                 </a:solidFill>
@@ -33519,7 +33519,7 @@
               <a:buNone/>
             </a:pPr>
             <a:r>
-              <a:rPr sz="1350" b="1">
+              <a:rPr sz="1350" b="1" lang="ja-JP" altLang="en-US">
                 <a:solidFill>
                   <a:srgbClr val="8C8C8C"/>
                 </a:solidFill>
@@ -33527,7 +33527,7 @@
               <a:t>✓  </a:t>
             </a:r>
             <a:r>
-              <a:rPr sz="1350" b="0">
+              <a:rPr sz="1350" b="0" lang="ja-JP" altLang="en-US">
                 <a:solidFill>
                   <a:srgbClr val="595959"/>
                 </a:solidFill>
@@ -33563,7 +33563,7 @@
               <a:buNone/>
             </a:pPr>
             <a:r>
-              <a:rPr sz="1350" b="1">
+              <a:rPr sz="1350" b="1" lang="ja-JP" altLang="en-US">
                 <a:solidFill>
                   <a:srgbClr val="8C8C8C"/>
                 </a:solidFill>
@@ -33571,7 +33571,7 @@
               <a:t>✓  </a:t>
             </a:r>
             <a:r>
-              <a:rPr sz="1350" b="0">
+              <a:rPr sz="1350" b="0" lang="ja-JP" altLang="en-US">
                 <a:solidFill>
                   <a:srgbClr val="595959"/>
                 </a:solidFill>
@@ -33607,7 +33607,7 @@
               <a:buNone/>
             </a:pPr>
             <a:r>
-              <a:rPr sz="1700" b="0">
+              <a:rPr sz="1700" b="0" lang="ja-JP" altLang="en-US">
                 <a:solidFill>
                   <a:srgbClr val="262626"/>
                 </a:solidFill>
@@ -33643,7 +33643,7 @@
               <a:buNone/>
             </a:pPr>
             <a:r>
-              <a:rPr sz="1600" b="0">
+              <a:rPr sz="1600" b="0" lang="ja-JP" altLang="en-US">
                 <a:solidFill>
                   <a:srgbClr val="262626"/>
                 </a:solidFill>
@@ -33679,7 +33679,7 @@
               <a:buNone/>
             </a:pPr>
             <a:r>
-              <a:rPr sz="1700" b="0">
+              <a:rPr sz="1700" b="0" lang="ja-JP" altLang="en-US">
                 <a:solidFill>
                   <a:srgbClr val="262626"/>
                 </a:solidFill>
@@ -33715,7 +33715,7 @@
               <a:buNone/>
             </a:pPr>
             <a:r>
-              <a:rPr sz="1600" b="0">
+              <a:rPr sz="1600" b="0" lang="ja-JP" altLang="en-US">
                 <a:solidFill>
                   <a:srgbClr val="262626"/>
                 </a:solidFill>
@@ -33751,7 +33751,7 @@
               <a:buNone/>
             </a:pPr>
             <a:r>
-              <a:rPr sz="1350" b="1">
+              <a:rPr sz="1350" b="1" lang="ja-JP" altLang="en-US">
                 <a:solidFill>
                   <a:srgbClr val="8C8C8C"/>
                 </a:solidFill>
@@ -33759,7 +33759,7 @@
               <a:t>✓  </a:t>
             </a:r>
             <a:r>
-              <a:rPr sz="1350" b="0">
+              <a:rPr sz="1350" b="0" lang="ja-JP" altLang="en-US">
                 <a:solidFill>
                   <a:srgbClr val="595959"/>
                 </a:solidFill>
@@ -33795,7 +33795,7 @@
               <a:buNone/>
             </a:pPr>
             <a:r>
-              <a:rPr sz="1700" b="0">
+              <a:rPr sz="1700" b="0" lang="ja-JP" altLang="en-US">
                 <a:solidFill>
                   <a:srgbClr val="262626"/>
                 </a:solidFill>
@@ -33831,7 +33831,7 @@
               <a:buNone/>
             </a:pPr>
             <a:r>
-              <a:rPr sz="1600" b="0">
+              <a:rPr sz="1600" b="0" lang="ja-JP" altLang="en-US">
                 <a:solidFill>
                   <a:srgbClr val="262626"/>
                 </a:solidFill>
@@ -33867,7 +33867,7 @@
               <a:buNone/>
             </a:pPr>
             <a:r>
-              <a:rPr sz="1350" b="1">
+              <a:rPr sz="1350" b="1" lang="ja-JP" altLang="en-US">
                 <a:solidFill>
                   <a:srgbClr val="8C8C8C"/>
                 </a:solidFill>
@@ -33875,7 +33875,7 @@
               <a:t>✓  </a:t>
             </a:r>
             <a:r>
-              <a:rPr sz="1350" b="0">
+              <a:rPr sz="1350" b="0" lang="ja-JP" altLang="en-US">
                 <a:solidFill>
                   <a:srgbClr val="595959"/>
                 </a:solidFill>
@@ -34688,7 +34688,7 @@
               <a:buNone/>
             </a:pPr>
             <a:r>
-              <a:rPr sz="1700" b="0">
+              <a:rPr sz="1700" b="0" lang="ja-JP" altLang="en-US">
                 <a:solidFill>
                   <a:srgbClr val="262626"/>
                 </a:solidFill>
@@ -34724,7 +34724,7 @@
               <a:buNone/>
             </a:pPr>
             <a:r>
-              <a:rPr sz="1600" b="0">
+              <a:rPr sz="1600" b="0" lang="ja-JP" altLang="en-US">
                 <a:solidFill>
                   <a:srgbClr val="262626"/>
                 </a:solidFill>
@@ -34791,7 +34791,7 @@
               <a:buNone/>
             </a:pPr>
             <a:r>
-              <a:rPr sz="1700" b="1">
+              <a:rPr sz="1700" b="1" lang="ja-JP" altLang="en-US">
                 <a:solidFill>
                   <a:srgbClr val="FFFFFF"/>
                 </a:solidFill>
@@ -34827,7 +34827,7 @@
               <a:buNone/>
             </a:pPr>
             <a:r>
-              <a:rPr sz="1600" b="1">
+              <a:rPr sz="1600" b="1" lang="ja-JP" altLang="en-US">
                 <a:solidFill>
                   <a:srgbClr val="FFFFFF"/>
                 </a:solidFill>
@@ -34863,7 +34863,7 @@
               <a:buNone/>
             </a:pPr>
             <a:r>
-              <a:rPr sz="1350" b="1">
+              <a:rPr sz="1350" b="1" lang="ja-JP" altLang="en-US">
                 <a:solidFill>
                   <a:srgbClr val="FFFFFF"/>
                 </a:solidFill>
@@ -34871,7 +34871,7 @@
               <a:t>✓  </a:t>
             </a:r>
             <a:r>
-              <a:rPr sz="1350" b="0">
+              <a:rPr sz="1350" b="0" lang="ja-JP" altLang="en-US">
                 <a:solidFill>
                   <a:srgbClr val="FFFFFF"/>
                 </a:solidFill>
@@ -34907,7 +34907,7 @@
               <a:buNone/>
             </a:pPr>
             <a:r>
-              <a:rPr sz="1350" b="1">
+              <a:rPr sz="1350" b="1" lang="ja-JP" altLang="en-US">
                 <a:solidFill>
                   <a:srgbClr val="FFFFFF"/>
                 </a:solidFill>
@@ -34915,7 +34915,7 @@
               <a:t>✓  </a:t>
             </a:r>
             <a:r>
-              <a:rPr sz="1350" b="0">
+              <a:rPr sz="1350" b="0" lang="ja-JP" altLang="en-US">
                 <a:solidFill>
                   <a:srgbClr val="FFFFFF"/>
                 </a:solidFill>
@@ -34951,7 +34951,7 @@
               <a:buNone/>
             </a:pPr>
             <a:r>
-              <a:rPr sz="1700" b="0">
+              <a:rPr sz="1700" b="0" lang="ja-JP" altLang="en-US">
                 <a:solidFill>
                   <a:srgbClr val="262626"/>
                 </a:solidFill>
@@ -34987,7 +34987,7 @@
               <a:buNone/>
             </a:pPr>
             <a:r>
-              <a:rPr sz="1600" b="0">
+              <a:rPr sz="1600" b="0" lang="ja-JP" altLang="en-US">
                 <a:solidFill>
                   <a:srgbClr val="262626"/>
                 </a:solidFill>
@@ -35023,7 +35023,7 @@
               <a:buNone/>
             </a:pPr>
             <a:r>
-              <a:rPr sz="1700" b="0">
+              <a:rPr sz="1700" b="0" lang="ja-JP" altLang="en-US">
                 <a:solidFill>
                   <a:srgbClr val="262626"/>
                 </a:solidFill>
@@ -35059,7 +35059,7 @@
               <a:buNone/>
             </a:pPr>
             <a:r>
-              <a:rPr sz="1600" b="0">
+              <a:rPr sz="1600" b="0" lang="ja-JP" altLang="en-US">
                 <a:solidFill>
                   <a:srgbClr val="262626"/>
                 </a:solidFill>
@@ -35095,7 +35095,7 @@
               <a:buNone/>
             </a:pPr>
             <a:r>
-              <a:rPr sz="1350" b="1">
+              <a:rPr sz="1350" b="1" lang="ja-JP" altLang="en-US">
                 <a:solidFill>
                   <a:srgbClr val="8C8C8C"/>
                 </a:solidFill>
@@ -35103,7 +35103,7 @@
               <a:t>✓  </a:t>
             </a:r>
             <a:r>
-              <a:rPr sz="1350" b="0">
+              <a:rPr sz="1350" b="0" lang="ja-JP" altLang="en-US">
                 <a:solidFill>
                   <a:srgbClr val="595959"/>
                 </a:solidFill>
@@ -35139,7 +35139,7 @@
               <a:buNone/>
             </a:pPr>
             <a:r>
-              <a:rPr sz="1700" b="0">
+              <a:rPr sz="1700" b="0" lang="ja-JP" altLang="en-US">
                 <a:solidFill>
                   <a:srgbClr val="262626"/>
                 </a:solidFill>
@@ -35175,7 +35175,7 @@
               <a:buNone/>
             </a:pPr>
             <a:r>
-              <a:rPr sz="1600" b="0">
+              <a:rPr sz="1600" b="0" lang="ja-JP" altLang="en-US">
                 <a:solidFill>
                   <a:srgbClr val="262626"/>
                 </a:solidFill>
@@ -35211,7 +35211,7 @@
               <a:buNone/>
             </a:pPr>
             <a:r>
-              <a:rPr sz="1350" b="1">
+              <a:rPr sz="1350" b="1" lang="ja-JP" altLang="en-US">
                 <a:solidFill>
                   <a:srgbClr val="8C8C8C"/>
                 </a:solidFill>
@@ -35219,7 +35219,7 @@
               <a:t>✓  </a:t>
             </a:r>
             <a:r>
-              <a:rPr sz="1350" b="0">
+              <a:rPr sz="1350" b="0" lang="ja-JP" altLang="en-US">
                 <a:solidFill>
                   <a:srgbClr val="595959"/>
                 </a:solidFill>
@@ -35366,7 +35366,7 @@
               <a:buNone/>
             </a:pPr>
             <a:r>
-              <a:rPr sz="1700" b="0">
+              <a:rPr sz="1700" b="0" lang="ja-JP" altLang="en-US">
                 <a:solidFill>
                   <a:srgbClr val="262626"/>
                 </a:solidFill>
@@ -35402,7 +35402,7 @@
               <a:buNone/>
             </a:pPr>
             <a:r>
-              <a:rPr sz="1600" b="0">
+              <a:rPr sz="1600" b="0" lang="ja-JP" altLang="en-US">
                 <a:solidFill>
                   <a:srgbClr val="262626"/>
                 </a:solidFill>
@@ -35438,7 +35438,7 @@
               <a:buNone/>
             </a:pPr>
             <a:r>
-              <a:rPr sz="1700" b="0">
+              <a:rPr sz="1700" b="0" lang="ja-JP" altLang="en-US">
                 <a:solidFill>
                   <a:srgbClr val="262626"/>
                 </a:solidFill>
@@ -35474,7 +35474,7 @@
               <a:buNone/>
             </a:pPr>
             <a:r>
-              <a:rPr sz="1600" b="0">
+              <a:rPr sz="1600" b="0" lang="ja-JP" altLang="en-US">
                 <a:solidFill>
                   <a:srgbClr val="262626"/>
                 </a:solidFill>
@@ -35510,7 +35510,7 @@
               <a:buNone/>
             </a:pPr>
             <a:r>
-              <a:rPr sz="1350" b="1">
+              <a:rPr sz="1350" b="1" lang="ja-JP" altLang="en-US">
                 <a:solidFill>
                   <a:srgbClr val="8C8C8C"/>
                 </a:solidFill>
@@ -35518,7 +35518,7 @@
               <a:t>✓  </a:t>
             </a:r>
             <a:r>
-              <a:rPr sz="1350" b="0">
+              <a:rPr sz="1350" b="0" lang="ja-JP" altLang="en-US">
                 <a:solidFill>
                   <a:srgbClr val="595959"/>
                 </a:solidFill>
@@ -35554,7 +35554,7 @@
               <a:buNone/>
             </a:pPr>
             <a:r>
-              <a:rPr sz="1350" b="1">
+              <a:rPr sz="1350" b="1" lang="ja-JP" altLang="en-US">
                 <a:solidFill>
                   <a:srgbClr val="8C8C8C"/>
                 </a:solidFill>
@@ -35562,7 +35562,7 @@
               <a:t>✓  </a:t>
             </a:r>
             <a:r>
-              <a:rPr sz="1350" b="0">
+              <a:rPr sz="1350" b="0" lang="ja-JP" altLang="en-US">
                 <a:solidFill>
                   <a:srgbClr val="595959"/>
                 </a:solidFill>
@@ -35629,7 +35629,7 @@
               <a:buNone/>
             </a:pPr>
             <a:r>
-              <a:rPr sz="1700" b="1">
+              <a:rPr sz="1700" b="1" lang="ja-JP" altLang="en-US">
                 <a:solidFill>
                   <a:srgbClr val="FFFFFF"/>
                 </a:solidFill>
@@ -35665,7 +35665,7 @@
               <a:buNone/>
             </a:pPr>
             <a:r>
-              <a:rPr sz="1600" b="1">
+              <a:rPr sz="1600" b="1" lang="ja-JP" altLang="en-US">
                 <a:solidFill>
                   <a:srgbClr val="FFFFFF"/>
                 </a:solidFill>
@@ -35701,7 +35701,7 @@
               <a:buNone/>
             </a:pPr>
             <a:r>
-              <a:rPr sz="1700" b="0">
+              <a:rPr sz="1700" b="0" lang="ja-JP" altLang="en-US">
                 <a:solidFill>
                   <a:srgbClr val="262626"/>
                 </a:solidFill>
@@ -35737,7 +35737,7 @@
               <a:buNone/>
             </a:pPr>
             <a:r>
-              <a:rPr sz="1600" b="0">
+              <a:rPr sz="1600" b="0" lang="ja-JP" altLang="en-US">
                 <a:solidFill>
                   <a:srgbClr val="262626"/>
                 </a:solidFill>
@@ -35773,7 +35773,7 @@
               <a:buNone/>
             </a:pPr>
             <a:r>
-              <a:rPr sz="1350" b="1">
+              <a:rPr sz="1350" b="1" lang="ja-JP" altLang="en-US">
                 <a:solidFill>
                   <a:srgbClr val="8C8C8C"/>
                 </a:solidFill>
@@ -35781,7 +35781,7 @@
               <a:t>✓  </a:t>
             </a:r>
             <a:r>
-              <a:rPr sz="1350" b="0">
+              <a:rPr sz="1350" b="0" lang="ja-JP" altLang="en-US">
                 <a:solidFill>
                   <a:srgbClr val="595959"/>
                 </a:solidFill>
@@ -35817,7 +35817,7 @@
               <a:buNone/>
             </a:pPr>
             <a:r>
-              <a:rPr sz="1700" b="0">
+              <a:rPr sz="1700" b="0" lang="ja-JP" altLang="en-US">
                 <a:solidFill>
                   <a:srgbClr val="262626"/>
                 </a:solidFill>
@@ -35853,7 +35853,7 @@
               <a:buNone/>
             </a:pPr>
             <a:r>
-              <a:rPr sz="1600" b="0">
+              <a:rPr sz="1600" b="0" lang="ja-JP" altLang="en-US">
                 <a:solidFill>
                   <a:srgbClr val="262626"/>
                 </a:solidFill>
@@ -35889,7 +35889,7 @@
               <a:buNone/>
             </a:pPr>
             <a:r>
-              <a:rPr sz="1350" b="1">
+              <a:rPr sz="1350" b="1" lang="ja-JP" altLang="en-US">
                 <a:solidFill>
                   <a:srgbClr val="8C8C8C"/>
                 </a:solidFill>
@@ -35897,7 +35897,7 @@
               <a:t>✓  </a:t>
             </a:r>
             <a:r>
-              <a:rPr sz="1350" b="0">
+              <a:rPr sz="1350" b="0" lang="ja-JP" altLang="en-US">
                 <a:solidFill>
                   <a:srgbClr val="595959"/>
                 </a:solidFill>
@@ -36044,7 +36044,7 @@
               <a:buNone/>
             </a:pPr>
             <a:r>
-              <a:rPr sz="1700" b="0">
+              <a:rPr sz="1700" b="0" lang="ja-JP" altLang="en-US">
                 <a:solidFill>
                   <a:srgbClr val="262626"/>
                 </a:solidFill>
@@ -36080,7 +36080,7 @@
               <a:buNone/>
             </a:pPr>
             <a:r>
-              <a:rPr sz="1600" b="0">
+              <a:rPr sz="1600" b="0" lang="ja-JP" altLang="en-US">
                 <a:solidFill>
                   <a:srgbClr val="262626"/>
                 </a:solidFill>
@@ -36116,7 +36116,7 @@
               <a:buNone/>
             </a:pPr>
             <a:r>
-              <a:rPr sz="1700" b="0">
+              <a:rPr sz="1700" b="0" lang="ja-JP" altLang="en-US">
                 <a:solidFill>
                   <a:srgbClr val="262626"/>
                 </a:solidFill>
@@ -36152,7 +36152,7 @@
               <a:buNone/>
             </a:pPr>
             <a:r>
-              <a:rPr sz="1600" b="0">
+              <a:rPr sz="1600" b="0" lang="ja-JP" altLang="en-US">
                 <a:solidFill>
                   <a:srgbClr val="262626"/>
                 </a:solidFill>
@@ -36188,7 +36188,7 @@
               <a:buNone/>
             </a:pPr>
             <a:r>
-              <a:rPr sz="1350" b="1">
+              <a:rPr sz="1350" b="1" lang="ja-JP" altLang="en-US">
                 <a:solidFill>
                   <a:srgbClr val="8C8C8C"/>
                 </a:solidFill>
@@ -36196,7 +36196,7 @@
               <a:t>✓  </a:t>
             </a:r>
             <a:r>
-              <a:rPr sz="1350" b="0">
+              <a:rPr sz="1350" b="0" lang="ja-JP" altLang="en-US">
                 <a:solidFill>
                   <a:srgbClr val="595959"/>
                 </a:solidFill>
@@ -36232,7 +36232,7 @@
               <a:buNone/>
             </a:pPr>
             <a:r>
-              <a:rPr sz="1350" b="1">
+              <a:rPr sz="1350" b="1" lang="ja-JP" altLang="en-US">
                 <a:solidFill>
                   <a:srgbClr val="8C8C8C"/>
                 </a:solidFill>
@@ -36240,7 +36240,7 @@
               <a:t>✓  </a:t>
             </a:r>
             <a:r>
-              <a:rPr sz="1350" b="0">
+              <a:rPr sz="1350" b="0" lang="ja-JP" altLang="en-US">
                 <a:solidFill>
                   <a:srgbClr val="595959"/>
                 </a:solidFill>
@@ -36276,7 +36276,7 @@
               <a:buNone/>
             </a:pPr>
             <a:r>
-              <a:rPr sz="1700" b="0">
+              <a:rPr sz="1700" b="0" lang="ja-JP" altLang="en-US">
                 <a:solidFill>
                   <a:srgbClr val="262626"/>
                 </a:solidFill>
@@ -36312,7 +36312,7 @@
               <a:buNone/>
             </a:pPr>
             <a:r>
-              <a:rPr sz="1600" b="0">
+              <a:rPr sz="1600" b="0" lang="ja-JP" altLang="en-US">
                 <a:solidFill>
                   <a:srgbClr val="262626"/>
                 </a:solidFill>
@@ -36379,7 +36379,7 @@
               <a:buNone/>
             </a:pPr>
             <a:r>
-              <a:rPr sz="1700" b="1">
+              <a:rPr sz="1700" b="1" lang="ja-JP" altLang="en-US">
                 <a:solidFill>
                   <a:srgbClr val="FFFFFF"/>
                 </a:solidFill>
@@ -36415,7 +36415,7 @@
               <a:buNone/>
             </a:pPr>
             <a:r>
-              <a:rPr sz="1600" b="1">
+              <a:rPr sz="1600" b="1" lang="ja-JP" altLang="en-US">
                 <a:solidFill>
                   <a:srgbClr val="FFFFFF"/>
                 </a:solidFill>
@@ -36451,7 +36451,7 @@
               <a:buNone/>
             </a:pPr>
             <a:r>
-              <a:rPr sz="1350" b="1">
+              <a:rPr sz="1350" b="1" lang="ja-JP" altLang="en-US">
                 <a:solidFill>
                   <a:srgbClr val="FFFFFF"/>
                 </a:solidFill>
@@ -36459,7 +36459,7 @@
               <a:t>✓  </a:t>
             </a:r>
             <a:r>
-              <a:rPr sz="1350" b="0">
+              <a:rPr sz="1350" b="0" lang="ja-JP" altLang="en-US">
                 <a:solidFill>
                   <a:srgbClr val="FFFFFF"/>
                 </a:solidFill>
@@ -36495,7 +36495,7 @@
               <a:buNone/>
             </a:pPr>
             <a:r>
-              <a:rPr sz="1700" b="0">
+              <a:rPr sz="1700" b="0" lang="ja-JP" altLang="en-US">
                 <a:solidFill>
                   <a:srgbClr val="262626"/>
                 </a:solidFill>
@@ -36531,7 +36531,7 @@
               <a:buNone/>
             </a:pPr>
             <a:r>
-              <a:rPr sz="1600" b="0">
+              <a:rPr sz="1600" b="0" lang="ja-JP" altLang="en-US">
                 <a:solidFill>
                   <a:srgbClr val="262626"/>
                 </a:solidFill>
@@ -36567,7 +36567,7 @@
               <a:buNone/>
             </a:pPr>
             <a:r>
-              <a:rPr sz="1350" b="1">
+              <a:rPr sz="1350" b="1" lang="ja-JP" altLang="en-US">
                 <a:solidFill>
                   <a:srgbClr val="8C8C8C"/>
                 </a:solidFill>
@@ -36575,7 +36575,7 @@
               <a:t>✓  </a:t>
             </a:r>
             <a:r>
-              <a:rPr sz="1350" b="0">
+              <a:rPr sz="1350" b="0" lang="ja-JP" altLang="en-US">
                 <a:solidFill>
                   <a:srgbClr val="595959"/>
                 </a:solidFill>
@@ -36722,7 +36722,7 @@
               <a:buNone/>
             </a:pPr>
             <a:r>
-              <a:rPr sz="1700" b="0">
+              <a:rPr sz="1700" b="0" lang="ja-JP" altLang="en-US">
                 <a:solidFill>
                   <a:srgbClr val="262626"/>
                 </a:solidFill>
@@ -36758,7 +36758,7 @@
               <a:buNone/>
             </a:pPr>
             <a:r>
-              <a:rPr sz="1600" b="0">
+              <a:rPr sz="1600" b="0" lang="ja-JP" altLang="en-US">
                 <a:solidFill>
                   <a:srgbClr val="262626"/>
                 </a:solidFill>
@@ -36794,7 +36794,7 @@
               <a:buNone/>
             </a:pPr>
             <a:r>
-              <a:rPr sz="1700" b="0">
+              <a:rPr sz="1700" b="0" lang="ja-JP" altLang="en-US">
                 <a:solidFill>
                   <a:srgbClr val="262626"/>
                 </a:solidFill>
@@ -36830,7 +36830,7 @@
               <a:buNone/>
             </a:pPr>
             <a:r>
-              <a:rPr sz="1600" b="0">
+              <a:rPr sz="1600" b="0" lang="ja-JP" altLang="en-US">
                 <a:solidFill>
                   <a:srgbClr val="262626"/>
                 </a:solidFill>
@@ -36866,7 +36866,7 @@
               <a:buNone/>
             </a:pPr>
             <a:r>
-              <a:rPr sz="1350" b="1">
+              <a:rPr sz="1350" b="1" lang="ja-JP" altLang="en-US">
                 <a:solidFill>
                   <a:srgbClr val="8C8C8C"/>
                 </a:solidFill>
@@ -36874,7 +36874,7 @@
               <a:t>✓  </a:t>
             </a:r>
             <a:r>
-              <a:rPr sz="1350" b="0">
+              <a:rPr sz="1350" b="0" lang="ja-JP" altLang="en-US">
                 <a:solidFill>
                   <a:srgbClr val="595959"/>
                 </a:solidFill>
@@ -36910,7 +36910,7 @@
               <a:buNone/>
             </a:pPr>
             <a:r>
-              <a:rPr sz="1350" b="1">
+              <a:rPr sz="1350" b="1" lang="ja-JP" altLang="en-US">
                 <a:solidFill>
                   <a:srgbClr val="8C8C8C"/>
                 </a:solidFill>
@@ -36918,7 +36918,7 @@
               <a:t>✓  </a:t>
             </a:r>
             <a:r>
-              <a:rPr sz="1350" b="0">
+              <a:rPr sz="1350" b="0" lang="ja-JP" altLang="en-US">
                 <a:solidFill>
                   <a:srgbClr val="595959"/>
                 </a:solidFill>
@@ -36954,7 +36954,7 @@
               <a:buNone/>
             </a:pPr>
             <a:r>
-              <a:rPr sz="1700" b="0">
+              <a:rPr sz="1700" b="0" lang="ja-JP" altLang="en-US">
                 <a:solidFill>
                   <a:srgbClr val="262626"/>
                 </a:solidFill>
@@ -36990,7 +36990,7 @@
               <a:buNone/>
             </a:pPr>
             <a:r>
-              <a:rPr sz="1600" b="0">
+              <a:rPr sz="1600" b="0" lang="ja-JP" altLang="en-US">
                 <a:solidFill>
                   <a:srgbClr val="262626"/>
                 </a:solidFill>
@@ -37026,7 +37026,7 @@
               <a:buNone/>
             </a:pPr>
             <a:r>
-              <a:rPr sz="1700" b="0">
+              <a:rPr sz="1700" b="0" lang="ja-JP" altLang="en-US">
                 <a:solidFill>
                   <a:srgbClr val="262626"/>
                 </a:solidFill>
@@ -37062,7 +37062,7 @@
               <a:buNone/>
             </a:pPr>
             <a:r>
-              <a:rPr sz="1600" b="0">
+              <a:rPr sz="1600" b="0" lang="ja-JP" altLang="en-US">
                 <a:solidFill>
                   <a:srgbClr val="262626"/>
                 </a:solidFill>
@@ -37098,7 +37098,7 @@
               <a:buNone/>
             </a:pPr>
             <a:r>
-              <a:rPr sz="1350" b="1">
+              <a:rPr sz="1350" b="1" lang="ja-JP" altLang="en-US">
                 <a:solidFill>
                   <a:srgbClr val="8C8C8C"/>
                 </a:solidFill>
@@ -37106,7 +37106,7 @@
               <a:t>✓  </a:t>
             </a:r>
             <a:r>
-              <a:rPr sz="1350" b="0">
+              <a:rPr sz="1350" b="0" lang="ja-JP" altLang="en-US">
                 <a:solidFill>
                   <a:srgbClr val="595959"/>
                 </a:solidFill>
@@ -37173,7 +37173,7 @@
               <a:buNone/>
             </a:pPr>
             <a:r>
-              <a:rPr sz="1700" b="1">
+              <a:rPr sz="1700" b="1" lang="ja-JP" altLang="en-US">
                 <a:solidFill>
                   <a:srgbClr val="FFFFFF"/>
                 </a:solidFill>
@@ -37209,7 +37209,7 @@
               <a:buNone/>
             </a:pPr>
             <a:r>
-              <a:rPr sz="1600" b="1">
+              <a:rPr sz="1600" b="1" lang="ja-JP" altLang="en-US">
                 <a:solidFill>
                   <a:srgbClr val="FFFFFF"/>
                 </a:solidFill>
@@ -37245,7 +37245,7 @@
               <a:buNone/>
             </a:pPr>
             <a:r>
-              <a:rPr sz="1350" b="1">
+              <a:rPr sz="1350" b="1" lang="ja-JP" altLang="en-US">
                 <a:solidFill>
                   <a:srgbClr val="FFFFFF"/>
                 </a:solidFill>
@@ -37253,7 +37253,7 @@
               <a:t>✓  </a:t>
             </a:r>
             <a:r>
-              <a:rPr sz="1350" b="0">
+              <a:rPr sz="1350" b="0" lang="ja-JP" altLang="en-US">
                 <a:solidFill>
                   <a:srgbClr val="FFFFFF"/>
                 </a:solidFill>
@@ -37448,7 +37448,7 @@
               <a:buNone/>
             </a:pPr>
             <a:r>
-              <a:rPr sz="1200" b="0">
+              <a:rPr sz="1200" b="0" lang="ja-JP" altLang="en-US">
                 <a:solidFill>
                   <a:srgbClr val="262626"/>
                 </a:solidFill>
@@ -37456,7 +37456,7 @@
               <a:t>支援期間　</a:t>
             </a:r>
             <a:r>
-              <a:rPr sz="1200" b="1">
+              <a:rPr sz="1200" b="1" lang="ja-JP" altLang="en-US">
                 <a:solidFill>
                   <a:srgbClr val="262626"/>
                 </a:solidFill>
@@ -37497,7 +37497,7 @@
               <a:buNone/>
             </a:pPr>
             <a:r>
-              <a:rPr sz="1200" b="1">
+              <a:rPr sz="1200" b="1" lang="ja-JP" altLang="en-US">
                 <a:solidFill>
                   <a:srgbClr val="595959"/>
                 </a:solidFill>
@@ -37538,7 +37538,7 @@
               <a:buNone/>
             </a:pPr>
             <a:r>
-              <a:rPr sz="1200" b="1">
+              <a:rPr sz="1200" b="1" lang="ja-JP" altLang="en-US">
                 <a:solidFill>
                   <a:srgbClr val="595959"/>
                 </a:solidFill>
@@ -37579,7 +37579,7 @@
               <a:buNone/>
             </a:pPr>
             <a:r>
-              <a:rPr sz="1200" b="1">
+              <a:rPr sz="1200" b="1" lang="ja-JP" altLang="en-US">
                 <a:solidFill>
                   <a:srgbClr val="FFFFFF"/>
                 </a:solidFill>
@@ -37620,7 +37620,7 @@
               <a:buNone/>
             </a:pPr>
             <a:r>
-              <a:rPr sz="1200" b="1">
+              <a:rPr sz="1200" b="1" lang="ja-JP" altLang="en-US">
                 <a:solidFill>
                   <a:srgbClr val="FFFFFF"/>
                 </a:solidFill>
@@ -38021,7 +38021,7 @@
               <a:buNone/>
             </a:pPr>
             <a:r>
-              <a:rPr sz="1000" b="1">
+              <a:rPr sz="1000" b="1" lang="ja-JP" altLang="en-US">
                 <a:solidFill>
                   <a:srgbClr val="FFFFFF"/>
                 </a:solidFill>
@@ -38059,7 +38059,7 @@
               <a:buNone/>
             </a:pPr>
             <a:r>
-              <a:rPr sz="1100" b="0">
+              <a:rPr sz="1100" b="0" lang="ja-JP" altLang="en-US">
                 <a:solidFill>
                   <a:srgbClr val="595959"/>
                 </a:solidFill>
@@ -38097,7 +38097,7 @@
               <a:buNone/>
             </a:pPr>
             <a:r>
-              <a:rPr sz="1100" b="0">
+              <a:rPr sz="1100" b="0" lang="ja-JP" altLang="en-US">
                 <a:solidFill>
                   <a:srgbClr val="595959"/>
                 </a:solidFill>
@@ -38135,7 +38135,7 @@
               <a:buNone/>
             </a:pPr>
             <a:r>
-              <a:rPr sz="1100" b="0">
+              <a:rPr sz="1100" b="0" lang="ja-JP" altLang="en-US">
                 <a:solidFill>
                   <a:srgbClr val="595959"/>
                 </a:solidFill>
@@ -38173,7 +38173,7 @@
               <a:buNone/>
             </a:pPr>
             <a:r>
-              <a:rPr sz="1100" b="0">
+              <a:rPr sz="1100" b="0" lang="ja-JP" altLang="en-US">
                 <a:solidFill>
                   <a:srgbClr val="595959"/>
                 </a:solidFill>
@@ -38211,7 +38211,7 @@
               <a:buNone/>
             </a:pPr>
             <a:r>
-              <a:rPr sz="1100" b="0">
+              <a:rPr sz="1100" b="0" lang="ja-JP" altLang="en-US">
                 <a:solidFill>
                   <a:srgbClr val="595959"/>
                 </a:solidFill>
@@ -38249,7 +38249,7 @@
               <a:buNone/>
             </a:pPr>
             <a:r>
-              <a:rPr sz="1100" b="0">
+              <a:rPr sz="1100" b="0" lang="ja-JP" altLang="en-US">
                 <a:solidFill>
                   <a:srgbClr val="595959"/>
                 </a:solidFill>
@@ -38287,7 +38287,7 @@
               <a:buNone/>
             </a:pPr>
             <a:r>
-              <a:rPr sz="1100" b="0">
+              <a:rPr sz="1100" b="0" lang="ja-JP" altLang="en-US">
                 <a:solidFill>
                   <a:srgbClr val="595959"/>
                 </a:solidFill>
@@ -38325,7 +38325,7 @@
               <a:buNone/>
             </a:pPr>
             <a:r>
-              <a:rPr sz="1100" b="0">
+              <a:rPr sz="1100" b="0" lang="ja-JP" altLang="en-US">
                 <a:solidFill>
                   <a:srgbClr val="595959"/>
                 </a:solidFill>
@@ -38363,7 +38363,7 @@
               <a:buNone/>
             </a:pPr>
             <a:r>
-              <a:rPr sz="1100" b="0">
+              <a:rPr sz="1100" b="0" lang="ja-JP" altLang="en-US">
                 <a:solidFill>
                   <a:srgbClr val="595959"/>
                 </a:solidFill>
@@ -38399,7 +38399,7 @@
               <a:buNone/>
             </a:pPr>
             <a:r>
-              <a:rPr sz="1200" b="1">
+              <a:rPr sz="1200" b="1" lang="ja-JP" altLang="en-US">
                 <a:solidFill>
                   <a:srgbClr val="262626"/>
                 </a:solidFill>
@@ -38440,7 +38440,7 @@
               <a:buNone/>
             </a:pPr>
             <a:r>
-              <a:rPr sz="1100" b="1">
+              <a:rPr sz="1100" b="1" lang="ja-JP" altLang="en-US">
                 <a:solidFill>
                   <a:srgbClr val="FFFFFF"/>
                 </a:solidFill>
@@ -38481,7 +38481,7 @@
               <a:buNone/>
             </a:pPr>
             <a:r>
-              <a:rPr sz="1100" b="1">
+              <a:rPr sz="1100" b="1" lang="ja-JP" altLang="en-US">
                 <a:solidFill>
                   <a:srgbClr val="FFFFFF"/>
                 </a:solidFill>
@@ -38522,7 +38522,7 @@
               <a:buNone/>
             </a:pPr>
             <a:r>
-              <a:rPr sz="1100" b="1">
+              <a:rPr sz="1100" b="1" lang="ja-JP" altLang="en-US">
                 <a:solidFill>
                   <a:srgbClr val="FFFFFF"/>
                 </a:solidFill>
@@ -38558,7 +38558,7 @@
               <a:buNone/>
             </a:pPr>
             <a:r>
-              <a:rPr sz="1200" b="1">
+              <a:rPr sz="1200" b="1" lang="ja-JP" altLang="en-US">
                 <a:solidFill>
                   <a:srgbClr val="262626"/>
                 </a:solidFill>
@@ -38571,7 +38571,7 @@
               <a:buNone/>
             </a:pPr>
             <a:r>
-              <a:rPr sz="1200" b="1">
+              <a:rPr sz="1200" b="1" lang="ja-JP" altLang="en-US">
                 <a:solidFill>
                   <a:srgbClr val="262626"/>
                 </a:solidFill>
@@ -38612,7 +38612,7 @@
               <a:buNone/>
             </a:pPr>
             <a:r>
-              <a:rPr sz="1100" b="1">
+              <a:rPr sz="1100" b="1" lang="ja-JP" altLang="en-US">
                 <a:solidFill>
                   <a:srgbClr val="FFFFFF"/>
                 </a:solidFill>
@@ -38648,7 +38648,7 @@
               <a:buNone/>
             </a:pPr>
             <a:r>
-              <a:rPr sz="1200" b="1">
+              <a:rPr sz="1200" b="1" lang="ja-JP" altLang="en-US">
                 <a:solidFill>
                   <a:srgbClr val="262626"/>
                 </a:solidFill>
@@ -38661,7 +38661,7 @@
               <a:buNone/>
             </a:pPr>
             <a:r>
-              <a:rPr sz="1200" b="1">
+              <a:rPr sz="1200" b="1" lang="ja-JP" altLang="en-US">
                 <a:solidFill>
                   <a:srgbClr val="262626"/>
                 </a:solidFill>
@@ -38697,7 +38697,7 @@
               <a:buNone/>
             </a:pPr>
             <a:r>
-              <a:rPr sz="1200" b="1">
+              <a:rPr sz="1200" b="1" lang="ja-JP" altLang="en-US">
                 <a:solidFill>
                   <a:srgbClr val="262626"/>
                 </a:solidFill>
@@ -38733,7 +38733,7 @@
               <a:buNone/>
             </a:pPr>
             <a:r>
-              <a:rPr sz="1100" b="0">
+              <a:rPr sz="1100" b="0" lang="ja-JP" altLang="en-US">
                 <a:solidFill>
                   <a:srgbClr val="595959"/>
                 </a:solidFill>
@@ -38746,7 +38746,7 @@
               <a:buNone/>
             </a:pPr>
             <a:r>
-              <a:rPr sz="1100" b="0">
+              <a:rPr sz="1100" b="0" lang="ja-JP" altLang="en-US">
                 <a:solidFill>
                   <a:srgbClr val="595959"/>
                 </a:solidFill>
@@ -38782,7 +38782,7 @@
               <a:buNone/>
             </a:pPr>
             <a:r>
-              <a:rPr sz="1100" b="0">
+              <a:rPr sz="1100" b="0" lang="ja-JP" altLang="en-US">
                 <a:solidFill>
                   <a:srgbClr val="595959"/>
                 </a:solidFill>
@@ -38795,7 +38795,7 @@
               <a:buNone/>
             </a:pPr>
             <a:r>
-              <a:rPr sz="1100" b="0">
+              <a:rPr sz="1100" b="0" lang="ja-JP" altLang="en-US">
                 <a:solidFill>
                   <a:srgbClr val="595959"/>
                 </a:solidFill>
@@ -38831,7 +38831,7 @@
               <a:buNone/>
             </a:pPr>
             <a:r>
-              <a:rPr sz="1100" b="0">
+              <a:rPr sz="1100" b="0" lang="ja-JP" altLang="en-US">
                 <a:solidFill>
                   <a:srgbClr val="595959"/>
                 </a:solidFill>
@@ -38844,7 +38844,7 @@
               <a:buNone/>
             </a:pPr>
             <a:r>
-              <a:rPr sz="1100" b="0">
+              <a:rPr sz="1100" b="0" lang="ja-JP" altLang="en-US">
                 <a:solidFill>
                   <a:srgbClr val="595959"/>
                 </a:solidFill>
@@ -38880,7 +38880,7 @@
               <a:buNone/>
             </a:pPr>
             <a:r>
-              <a:rPr sz="1100" b="0">
+              <a:rPr sz="1100" b="0" lang="ja-JP" altLang="en-US">
                 <a:solidFill>
                   <a:srgbClr val="595959"/>
                 </a:solidFill>
@@ -38893,7 +38893,7 @@
               <a:buNone/>
             </a:pPr>
             <a:r>
-              <a:rPr sz="1100" b="0">
+              <a:rPr sz="1100" b="0" lang="ja-JP" altLang="en-US">
                 <a:solidFill>
                   <a:srgbClr val="595959"/>
                 </a:solidFill>
@@ -38929,7 +38929,7 @@
               <a:buNone/>
             </a:pPr>
             <a:r>
-              <a:rPr sz="1100" b="0">
+              <a:rPr sz="1100" b="0" lang="ja-JP" altLang="en-US">
                 <a:solidFill>
                   <a:srgbClr val="595959"/>
                 </a:solidFill>
@@ -38972,7 +38972,7 @@
               <a:buNone/>
             </a:pPr>
             <a:r>
-              <a:rPr sz="1050" b="0">
+              <a:rPr sz="1050" b="0" lang="ja-JP" altLang="en-US">
                 <a:solidFill>
                   <a:srgbClr val="262626"/>
                 </a:solidFill>
@@ -38985,7 +38985,7 @@
               <a:buNone/>
             </a:pPr>
             <a:r>
-              <a:rPr sz="1050" b="0">
+              <a:rPr sz="1050" b="0" lang="ja-JP" altLang="en-US">
                 <a:solidFill>
                   <a:srgbClr val="262626"/>
                 </a:solidFill>
@@ -39028,7 +39028,7 @@
               <a:buNone/>
             </a:pPr>
             <a:r>
-              <a:rPr sz="1100" b="0">
+              <a:rPr sz="1100" b="0" lang="ja-JP" altLang="en-US">
                 <a:solidFill>
                   <a:srgbClr val="262626"/>
                 </a:solidFill>
@@ -39071,7 +39071,7 @@
               <a:buNone/>
             </a:pPr>
             <a:r>
-              <a:rPr sz="1100" b="0">
+              <a:rPr sz="1100" b="0" lang="ja-JP" altLang="en-US">
                 <a:solidFill>
                   <a:srgbClr val="262626"/>
                 </a:solidFill>
@@ -39117,7 +39117,7 @@
               <a:buNone/>
             </a:pPr>
             <a:r>
-              <a:rPr sz="950" b="1">
+              <a:rPr sz="950" b="1" lang="ja-JP" altLang="en-US">
                 <a:solidFill>
                   <a:srgbClr val="404040"/>
                 </a:solidFill>
@@ -39130,7 +39130,7 @@
               <a:buNone/>
             </a:pPr>
             <a:r>
-              <a:rPr sz="950" b="1">
+              <a:rPr sz="950" b="1" lang="ja-JP" altLang="en-US">
                 <a:solidFill>
                   <a:srgbClr val="404040"/>
                 </a:solidFill>
@@ -39176,7 +39176,7 @@
               <a:buNone/>
             </a:pPr>
             <a:r>
-              <a:rPr sz="1100" b="1">
+              <a:rPr sz="1100" b="1" lang="ja-JP" altLang="en-US">
                 <a:solidFill>
                   <a:srgbClr val="404040"/>
                 </a:solidFill>
@@ -39222,7 +39222,7 @@
               <a:buNone/>
             </a:pPr>
             <a:r>
-              <a:rPr sz="1100" b="1">
+              <a:rPr sz="1100" b="1" lang="ja-JP" altLang="en-US">
                 <a:solidFill>
                   <a:srgbClr val="404040"/>
                 </a:solidFill>
@@ -39265,7 +39265,7 @@
               <a:buNone/>
             </a:pPr>
             <a:r>
-              <a:rPr sz="1100" b="1">
+              <a:rPr sz="1100" b="1" lang="ja-JP" altLang="en-US">
                 <a:solidFill>
                   <a:srgbClr val="FFFFFF"/>
                 </a:solidFill>
@@ -39278,7 +39278,7 @@
               <a:buNone/>
             </a:pPr>
             <a:r>
-              <a:rPr sz="1100" b="1">
+              <a:rPr sz="1100" b="1" lang="ja-JP" altLang="en-US">
                 <a:solidFill>
                   <a:srgbClr val="FFFFFF"/>
                 </a:solidFill>
@@ -39324,7 +39324,7 @@
               <a:buNone/>
             </a:pPr>
             <a:r>
-              <a:rPr sz="1100" b="0">
+              <a:rPr sz="1100" b="0" lang="ja-JP" altLang="en-US">
                 <a:solidFill>
                   <a:srgbClr val="595959"/>
                 </a:solidFill>
@@ -39370,7 +39370,7 @@
               <a:buNone/>
             </a:pPr>
             <a:r>
-              <a:rPr sz="1100" b="0">
+              <a:rPr sz="1100" b="0" lang="ja-JP" altLang="en-US">
                 <a:solidFill>
                   <a:srgbClr val="595959"/>
                 </a:solidFill>
@@ -39505,7 +39505,7 @@
               <a:buNone/>
             </a:pPr>
             <a:r>
-              <a:rPr sz="1100" b="1">
+              <a:rPr sz="1100" b="1" lang="ja-JP" altLang="en-US">
                 <a:solidFill>
                   <a:srgbClr val="404040"/>
                 </a:solidFill>
@@ -39574,7 +39574,7 @@
               <a:buNone/>
             </a:pPr>
             <a:r>
-              <a:rPr sz="1100" b="1">
+              <a:rPr sz="1100" b="1" lang="ja-JP" altLang="en-US">
                 <a:solidFill>
                   <a:srgbClr val="404040"/>
                 </a:solidFill>
@@ -39643,7 +39643,7 @@
               <a:buNone/>
             </a:pPr>
             <a:r>
-              <a:rPr sz="1100" b="1">
+              <a:rPr sz="1100" b="1" lang="ja-JP" altLang="en-US">
                 <a:solidFill>
                   <a:srgbClr val="404040"/>
                 </a:solidFill>
@@ -39712,7 +39712,7 @@
               <a:buNone/>
             </a:pPr>
             <a:r>
-              <a:rPr sz="1100" b="1">
+              <a:rPr sz="1100" b="1" lang="ja-JP" altLang="en-US">
                 <a:solidFill>
                   <a:srgbClr val="046A38"/>
                 </a:solidFill>
@@ -39781,7 +39781,7 @@
               <a:buNone/>
             </a:pPr>
             <a:r>
-              <a:rPr sz="1100" b="1">
+              <a:rPr sz="1100" b="1" lang="ja-JP" altLang="en-US">
                 <a:solidFill>
                   <a:srgbClr val="046A38"/>
                 </a:solidFill>
@@ -39848,7 +39848,7 @@
               <a:buNone/>
             </a:pPr>
             <a:r>
-              <a:rPr sz="1000" b="0">
+              <a:rPr sz="1000" b="0" lang="ja-JP" altLang="en-US">
                 <a:solidFill>
                   <a:srgbClr val="595959"/>
                 </a:solidFill>
@@ -39915,7 +39915,7 @@
               <a:buNone/>
             </a:pPr>
             <a:r>
-              <a:rPr sz="1000" b="0">
+              <a:rPr sz="1000" b="0" lang="ja-JP" altLang="en-US">
                 <a:solidFill>
                   <a:srgbClr val="595959"/>
                 </a:solidFill>
@@ -39985,7 +39985,7 @@
               <a:buNone/>
             </a:pPr>
             <a:r>
-              <a:rPr sz="1000" b="0">
+              <a:rPr sz="1000" b="0" lang="ja-JP" altLang="en-US">
                 <a:solidFill>
                   <a:srgbClr val="595959"/>
                 </a:solidFill>
@@ -40052,7 +40052,7 @@
               <a:buNone/>
             </a:pPr>
             <a:r>
-              <a:rPr sz="1000" b="0">
+              <a:rPr sz="1000" b="0" lang="ja-JP" altLang="en-US">
                 <a:solidFill>
                   <a:srgbClr val="595959"/>
                 </a:solidFill>
@@ -40119,7 +40119,7 @@
               <a:buNone/>
             </a:pPr>
             <a:r>
-              <a:rPr sz="1000" b="0">
+              <a:rPr sz="1000" b="0" lang="ja-JP" altLang="en-US">
                 <a:solidFill>
                   <a:srgbClr val="595959"/>
                 </a:solidFill>
@@ -40188,7 +40188,7 @@
               <a:buNone/>
             </a:pPr>
             <a:r>
-              <a:rPr sz="1000" b="0">
+              <a:rPr sz="1000" b="0" lang="ja-JP" altLang="en-US">
                 <a:solidFill>
                   <a:srgbClr val="595959"/>
                 </a:solidFill>
@@ -40409,7 +40409,7 @@
               <a:buNone/>
             </a:pPr>
             <a:r>
-              <a:rPr sz="950" b="1">
+              <a:rPr sz="950" b="1" lang="ja-JP" altLang="en-US">
                 <a:solidFill>
                   <a:srgbClr val="262626"/>
                 </a:solidFill>
@@ -40476,7 +40476,7 @@
               <a:buNone/>
             </a:pPr>
             <a:r>
-              <a:rPr sz="950" b="0">
+              <a:rPr sz="950" b="0" lang="ja-JP" altLang="en-US">
                 <a:solidFill>
                   <a:srgbClr val="8C8C8C"/>
                 </a:solidFill>
@@ -40543,7 +40543,7 @@
               <a:buNone/>
             </a:pPr>
             <a:r>
-              <a:rPr sz="950" b="0">
+              <a:rPr sz="950" b="0" lang="ja-JP" altLang="en-US">
                 <a:solidFill>
                   <a:srgbClr val="8C8C8C"/>
                 </a:solidFill>
@@ -40615,7 +40615,7 @@
               <a:buNone/>
             </a:pPr>
             <a:r>
-              <a:rPr sz="1300" b="1">
+              <a:rPr sz="1300" b="1" lang="ja-JP" altLang="en-US">
                 <a:solidFill>
                   <a:srgbClr val="FFFFFF"/>
                 </a:solidFill>
@@ -40694,7 +40694,7 @@
               <a:buChar char="•"/>
             </a:pPr>
             <a:r>
-              <a:rPr sz="1200" b="1">
+              <a:rPr sz="1200" b="1" lang="ja-JP" altLang="en-US">
                 <a:solidFill>
                   <a:srgbClr val="262626"/>
                 </a:solidFill>
@@ -40702,7 +40702,7 @@
               <a:t>10/5 </a:t>
             </a:r>
             <a:r>
-              <a:rPr sz="1200" b="0">
+              <a:rPr sz="1200" b="0" lang="ja-JP" altLang="en-US">
                 <a:solidFill>
                   <a:srgbClr val="262626"/>
                 </a:solidFill>
@@ -40725,7 +40725,7 @@
               <a:buChar char="•"/>
             </a:pPr>
             <a:r>
-              <a:rPr sz="1200" b="1">
+              <a:rPr sz="1200" b="1" lang="ja-JP" altLang="en-US">
                 <a:solidFill>
                   <a:srgbClr val="262626"/>
                 </a:solidFill>
@@ -40733,7 +40733,7 @@
               <a:t>改修 </a:t>
             </a:r>
             <a:r>
-              <a:rPr sz="1200" b="0">
+              <a:rPr sz="1200" b="0" lang="ja-JP" altLang="en-US">
                 <a:solidFill>
                   <a:srgbClr val="262626"/>
                 </a:solidFill>
@@ -40756,7 +40756,7 @@
               <a:buChar char="•"/>
             </a:pPr>
             <a:r>
-              <a:rPr sz="1200" b="1">
+              <a:rPr sz="1200" b="1" lang="ja-JP" altLang="en-US">
                 <a:solidFill>
                   <a:srgbClr val="262626"/>
                 </a:solidFill>
@@ -40764,7 +40764,7 @@
               <a:t>外部データ </a:t>
             </a:r>
             <a:r>
-              <a:rPr sz="1200" b="0">
+              <a:rPr sz="1200" b="0" lang="ja-JP" altLang="en-US">
                 <a:solidFill>
                   <a:srgbClr val="262626"/>
                 </a:solidFill>
@@ -40787,7 +40787,7 @@
               <a:buChar char="•"/>
             </a:pPr>
             <a:r>
-              <a:rPr sz="1200" b="1">
+              <a:rPr sz="1200" b="1" lang="ja-JP" altLang="en-US">
                 <a:solidFill>
                   <a:srgbClr val="262626"/>
                 </a:solidFill>
@@ -40795,7 +40795,7 @@
               <a:t>品質 </a:t>
             </a:r>
             <a:r>
-              <a:rPr sz="1200" b="0">
+              <a:rPr sz="1200" b="0" lang="ja-JP" altLang="en-US">
                 <a:solidFill>
                   <a:srgbClr val="262626"/>
                 </a:solidFill>
@@ -40818,7 +40818,7 @@
               <a:buChar char="•"/>
             </a:pPr>
             <a:r>
-              <a:rPr sz="1200" b="1">
+              <a:rPr sz="1200" b="1" lang="ja-JP" altLang="en-US">
                 <a:solidFill>
                   <a:srgbClr val="262626"/>
                 </a:solidFill>
@@ -40826,7 +40826,7 @@
               <a:t>ドキュメント </a:t>
             </a:r>
             <a:r>
-              <a:rPr sz="1200" b="0">
+              <a:rPr sz="1200" b="0" lang="ja-JP" altLang="en-US">
                 <a:solidFill>
                   <a:srgbClr val="262626"/>
                 </a:solidFill>
@@ -40867,7 +40867,7 @@
               <a:buNone/>
             </a:pPr>
             <a:r>
-              <a:rPr sz="1300" b="1">
+              <a:rPr sz="1300" b="1" lang="ja-JP" altLang="en-US">
                 <a:solidFill>
                   <a:srgbClr val="FFFFFF"/>
                 </a:solidFill>
@@ -40946,7 +40946,7 @@
               <a:buChar char="•"/>
             </a:pPr>
             <a:r>
-              <a:rPr sz="1200" b="1">
+              <a:rPr sz="1200" b="1" lang="ja-JP" altLang="en-US">
                 <a:solidFill>
                   <a:srgbClr val="262626"/>
                 </a:solidFill>
@@ -40954,7 +40954,7 @@
               <a:t>10/7 </a:t>
             </a:r>
             <a:r>
-              <a:rPr sz="1200" b="0">
+              <a:rPr sz="1200" b="0" lang="ja-JP" altLang="en-US">
                 <a:solidFill>
                   <a:srgbClr val="262626"/>
                 </a:solidFill>
@@ -40977,7 +40977,7 @@
               <a:buChar char="•"/>
             </a:pPr>
             <a:r>
-              <a:rPr sz="1200" b="1">
+              <a:rPr sz="1200" b="1" lang="ja-JP" altLang="en-US">
                 <a:solidFill>
                   <a:srgbClr val="262626"/>
                 </a:solidFill>
@@ -40985,7 +40985,7 @@
               <a:t>10/8〜 </a:t>
             </a:r>
             <a:r>
-              <a:rPr sz="1200" b="0">
+              <a:rPr sz="1200" b="0" lang="ja-JP" altLang="en-US">
                 <a:solidFill>
                   <a:srgbClr val="262626"/>
                 </a:solidFill>
@@ -41008,7 +41008,7 @@
               <a:buChar char="•"/>
             </a:pPr>
             <a:r>
-              <a:rPr sz="1200" b="1">
+              <a:rPr sz="1200" b="1" lang="ja-JP" altLang="en-US">
                 <a:solidFill>
                   <a:srgbClr val="262626"/>
                 </a:solidFill>
@@ -41016,7 +41016,7 @@
               <a:t>引継ぎ </a:t>
             </a:r>
             <a:r>
-              <a:rPr sz="1200" b="0">
+              <a:rPr sz="1200" b="0" lang="ja-JP" altLang="en-US">
                 <a:solidFill>
                   <a:srgbClr val="262626"/>
                 </a:solidFill>
@@ -41039,7 +41039,7 @@
               <a:buChar char="•"/>
             </a:pPr>
             <a:r>
-              <a:rPr sz="1200" b="1">
+              <a:rPr sz="1200" b="1" lang="ja-JP" altLang="en-US">
                 <a:solidFill>
                   <a:srgbClr val="262626"/>
                 </a:solidFill>
@@ -41047,7 +41047,7 @@
               <a:t>10/15頃 </a:t>
             </a:r>
             <a:r>
-              <a:rPr sz="1200" b="0">
+              <a:rPr sz="1200" b="0" lang="ja-JP" altLang="en-US">
                 <a:solidFill>
                   <a:srgbClr val="262626"/>
                 </a:solidFill>
@@ -41070,7 +41070,7 @@
               <a:buChar char="•"/>
             </a:pPr>
             <a:r>
-              <a:rPr sz="1200" b="1">
+              <a:rPr sz="1200" b="1" lang="ja-JP" altLang="en-US">
                 <a:solidFill>
                   <a:srgbClr val="262626"/>
                 </a:solidFill>
@@ -41078,7 +41078,7 @@
               <a:t>外部データ </a:t>
             </a:r>
             <a:r>
-              <a:rPr sz="1200" b="0">
+              <a:rPr sz="1200" b="0" lang="ja-JP" altLang="en-US">
                 <a:solidFill>
                   <a:srgbClr val="262626"/>
                 </a:solidFill>
@@ -41119,7 +41119,7 @@
               <a:buNone/>
             </a:pPr>
             <a:r>
-              <a:rPr sz="1250" b="1">
+              <a:rPr sz="1250" b="1" lang="ja-JP" altLang="en-US">
                 <a:solidFill>
                   <a:srgbClr val="FFFFFF"/>
                 </a:solidFill>
@@ -41167,7 +41167,7 @@
                         <a:buNone/>
                       </a:pPr>
                       <a:r>
-                        <a:rPr sz="1100" b="1">
+                        <a:rPr sz="1100" b="1" lang="ja-JP" altLang="en-US">
                           <a:solidFill>
                             <a:srgbClr val="595959"/>
                           </a:solidFill>
@@ -41208,7 +41208,7 @@
                         <a:buNone/>
                       </a:pPr>
                       <a:r>
-                        <a:rPr sz="1100" b="1">
+                        <a:rPr sz="1100" b="1" lang="ja-JP" altLang="en-US">
                           <a:solidFill>
                             <a:srgbClr val="595959"/>
                           </a:solidFill>
@@ -41249,7 +41249,7 @@
                         <a:buNone/>
                       </a:pPr>
                       <a:r>
-                        <a:rPr sz="1100" b="1">
+                        <a:rPr sz="1100" b="1" lang="ja-JP" altLang="en-US">
                           <a:solidFill>
                             <a:srgbClr val="595959"/>
                           </a:solidFill>
@@ -41290,7 +41290,7 @@
                         <a:buNone/>
                       </a:pPr>
                       <a:r>
-                        <a:rPr sz="1100" b="1">
+                        <a:rPr sz="1100" b="1" lang="ja-JP" altLang="en-US">
                           <a:solidFill>
                             <a:srgbClr val="595959"/>
                           </a:solidFill>
@@ -41331,7 +41331,7 @@
                         <a:buNone/>
                       </a:pPr>
                       <a:r>
-                        <a:rPr sz="1100" b="1">
+                        <a:rPr sz="1100" b="1" lang="ja-JP" altLang="en-US">
                           <a:solidFill>
                             <a:srgbClr val="595959"/>
                           </a:solidFill>
@@ -41374,7 +41374,7 @@
                         <a:buNone/>
                       </a:pPr>
                       <a:r>
-                        <a:rPr sz="1100" b="0">
+                        <a:rPr sz="1100" b="0" lang="ja-JP" altLang="en-US">
                           <a:solidFill>
                             <a:srgbClr val="1A1A1A"/>
                           </a:solidFill>
@@ -41413,7 +41413,7 @@
                         <a:buNone/>
                       </a:pPr>
                       <a:r>
-                        <a:rPr sz="1100" b="0">
+                        <a:rPr sz="1100" b="0" lang="ja-JP" altLang="en-US">
                           <a:solidFill>
                             <a:srgbClr val="1A1A1A"/>
                           </a:solidFill>
@@ -41452,7 +41452,7 @@
                         <a:buNone/>
                       </a:pPr>
                       <a:r>
-                        <a:rPr sz="1100" b="1">
+                        <a:rPr sz="1100" b="1" lang="ja-JP" altLang="en-US">
                           <a:solidFill>
                             <a:srgbClr val="1A1A1A"/>
                           </a:solidFill>
@@ -41491,7 +41491,7 @@
                         <a:buNone/>
                       </a:pPr>
                       <a:r>
-                        <a:rPr sz="1100" b="0">
+                        <a:rPr sz="1100" b="0" lang="ja-JP" altLang="en-US">
                           <a:solidFill>
                             <a:srgbClr val="1A1A1A"/>
                           </a:solidFill>
@@ -41530,7 +41530,7 @@
                         <a:buNone/>
                       </a:pPr>
                       <a:r>
-                        <a:rPr sz="1100" b="0">
+                        <a:rPr sz="1100" b="0" lang="ja-JP" altLang="en-US">
                           <a:solidFill>
                             <a:srgbClr val="1A1A1A"/>
                           </a:solidFill>
@@ -41571,7 +41571,7 @@
                         <a:buNone/>
                       </a:pPr>
                       <a:r>
-                        <a:rPr sz="1100" b="0">
+                        <a:rPr sz="1100" b="0" lang="ja-JP" altLang="en-US">
                           <a:solidFill>
                             <a:srgbClr val="1A1A1A"/>
                           </a:solidFill>
@@ -41610,7 +41610,7 @@
                         <a:buNone/>
                       </a:pPr>
                       <a:r>
-                        <a:rPr sz="1100" b="0">
+                        <a:rPr sz="1100" b="0" lang="ja-JP" altLang="en-US">
                           <a:solidFill>
                             <a:srgbClr val="1A1A1A"/>
                           </a:solidFill>
@@ -41649,7 +41649,7 @@
                         <a:buNone/>
                       </a:pPr>
                       <a:r>
-                        <a:rPr sz="1100" b="1">
+                        <a:rPr sz="1100" b="1" lang="ja-JP" altLang="en-US">
                           <a:solidFill>
                             <a:srgbClr val="1A1A1A"/>
                           </a:solidFill>
@@ -41688,7 +41688,7 @@
                         <a:buNone/>
                       </a:pPr>
                       <a:r>
-                        <a:rPr sz="1100" b="0">
+                        <a:rPr sz="1100" b="0" lang="ja-JP" altLang="en-US">
                           <a:solidFill>
                             <a:srgbClr val="1A1A1A"/>
                           </a:solidFill>
@@ -41727,7 +41727,7 @@
                         <a:buNone/>
                       </a:pPr>
                       <a:r>
-                        <a:rPr sz="1100" b="0">
+                        <a:rPr sz="1100" b="0" lang="ja-JP" altLang="en-US">
                           <a:solidFill>
                             <a:srgbClr val="1A1A1A"/>
                           </a:solidFill>
@@ -41768,7 +41768,7 @@
                         <a:buNone/>
                       </a:pPr>
                       <a:r>
-                        <a:rPr sz="1100" b="1">
+                        <a:rPr sz="1100" b="1" lang="ja-JP" altLang="en-US">
                           <a:solidFill>
                             <a:srgbClr val="1A1A1A"/>
                           </a:solidFill>
@@ -41807,7 +41807,7 @@
                         <a:buNone/>
                       </a:pPr>
                       <a:r>
-                        <a:rPr sz="1100" b="0">
+                        <a:rPr sz="1100" b="0" lang="ja-JP" altLang="en-US">
                           <a:solidFill>
                             <a:srgbClr val="1A1A1A"/>
                           </a:solidFill>
@@ -41846,7 +41846,7 @@
                         <a:buNone/>
                       </a:pPr>
                       <a:r>
-                        <a:rPr sz="1100" b="1">
+                        <a:rPr sz="1100" b="1" lang="ja-JP" altLang="en-US">
                           <a:solidFill>
                             <a:srgbClr val="1A1A1A"/>
                           </a:solidFill>
@@ -41885,7 +41885,7 @@
                         <a:buNone/>
                       </a:pPr>
                       <a:r>
-                        <a:rPr sz="1100" b="0">
+                        <a:rPr sz="1100" b="0" lang="ja-JP" altLang="en-US">
                           <a:solidFill>
                             <a:srgbClr val="1A1A1A"/>
                           </a:solidFill>
@@ -41924,7 +41924,7 @@
                         <a:buNone/>
                       </a:pPr>
                       <a:r>
-                        <a:rPr sz="1100" b="0">
+                        <a:rPr sz="1100" b="0" lang="ja-JP" altLang="en-US">
                           <a:solidFill>
                             <a:srgbClr val="1A1A1A"/>
                           </a:solidFill>
@@ -42147,7 +42147,7 @@
                         <a:buNone/>
                       </a:pPr>
                       <a:r>
-                        <a:rPr sz="1150" b="1">
+                        <a:rPr sz="1150" b="1" lang="ja-JP" altLang="en-US">
                           <a:solidFill>
                             <a:srgbClr val="FFFFFF"/>
                           </a:solidFill>
@@ -42188,7 +42188,7 @@
                         <a:buNone/>
                       </a:pPr>
                       <a:r>
-                        <a:rPr sz="1150" b="1">
+                        <a:rPr sz="1150" b="1" lang="ja-JP" altLang="en-US">
                           <a:solidFill>
                             <a:srgbClr val="FFFFFF"/>
                           </a:solidFill>
@@ -42229,7 +42229,7 @@
                         <a:buNone/>
                       </a:pPr>
                       <a:r>
-                        <a:rPr sz="1150" b="1">
+                        <a:rPr sz="1150" b="1" lang="ja-JP" altLang="en-US">
                           <a:solidFill>
                             <a:srgbClr val="FFFFFF"/>
                           </a:solidFill>
@@ -42270,7 +42270,7 @@
                         <a:buNone/>
                       </a:pPr>
                       <a:r>
-                        <a:rPr sz="1150" b="1">
+                        <a:rPr sz="1150" b="1" lang="ja-JP" altLang="en-US">
                           <a:solidFill>
                             <a:srgbClr val="FFFFFF"/>
                           </a:solidFill>
@@ -42313,7 +42313,7 @@
                         <a:buNone/>
                       </a:pPr>
                       <a:r>
-                        <a:rPr sz="1100" b="1">
+                        <a:rPr sz="1100" b="1" lang="ja-JP" altLang="en-US">
                           <a:solidFill>
                             <a:srgbClr val="262626"/>
                           </a:solidFill>
@@ -42354,7 +42354,7 @@
                         <a:buNone/>
                       </a:pPr>
                       <a:r>
-                        <a:rPr sz="1100" b="0">
+                        <a:rPr sz="1100" b="0" lang="ja-JP" altLang="en-US">
                           <a:solidFill>
                             <a:srgbClr val="262626"/>
                           </a:solidFill>
@@ -42395,7 +42395,7 @@
                         <a:buNone/>
                       </a:pPr>
                       <a:r>
-                        <a:rPr sz="1100" b="0">
+                        <a:rPr sz="1100" b="0" lang="ja-JP" altLang="en-US">
                           <a:solidFill>
                             <a:srgbClr val="1A1A1A"/>
                           </a:solidFill>
@@ -42436,7 +42436,7 @@
                         <a:buNone/>
                       </a:pPr>
                       <a:r>
-                        <a:rPr sz="1100" b="1">
+                        <a:rPr sz="1100" b="1" lang="ja-JP" altLang="en-US">
                           <a:solidFill>
                             <a:srgbClr val="046A38"/>
                           </a:solidFill>
@@ -42479,7 +42479,7 @@
                         <a:buNone/>
                       </a:pPr>
                       <a:r>
-                        <a:rPr sz="1100" b="1">
+                        <a:rPr sz="1100" b="1" lang="ja-JP" altLang="en-US">
                           <a:solidFill>
                             <a:srgbClr val="262626"/>
                           </a:solidFill>
@@ -42520,7 +42520,7 @@
                         <a:buNone/>
                       </a:pPr>
                       <a:r>
-                        <a:rPr sz="1100" b="0">
+                        <a:rPr sz="1100" b="0" lang="ja-JP" altLang="en-US">
                           <a:solidFill>
                             <a:srgbClr val="262626"/>
                           </a:solidFill>
@@ -42561,7 +42561,7 @@
                         <a:buNone/>
                       </a:pPr>
                       <a:r>
-                        <a:rPr sz="1100" b="0">
+                        <a:rPr sz="1100" b="0" lang="ja-JP" altLang="en-US">
                           <a:solidFill>
                             <a:srgbClr val="1A1A1A"/>
                           </a:solidFill>
@@ -42602,7 +42602,7 @@
                         <a:buNone/>
                       </a:pPr>
                       <a:r>
-                        <a:rPr sz="1100" b="1">
+                        <a:rPr sz="1100" b="1" lang="ja-JP" altLang="en-US">
                           <a:solidFill>
                             <a:srgbClr val="046A38"/>
                           </a:solidFill>
@@ -42645,7 +42645,7 @@
                         <a:buNone/>
                       </a:pPr>
                       <a:r>
-                        <a:rPr sz="1100" b="1">
+                        <a:rPr sz="1100" b="1" lang="ja-JP" altLang="en-US">
                           <a:solidFill>
                             <a:srgbClr val="262626"/>
                           </a:solidFill>
@@ -42686,7 +42686,7 @@
                         <a:buNone/>
                       </a:pPr>
                       <a:r>
-                        <a:rPr sz="1100" b="0">
+                        <a:rPr sz="1100" b="0" lang="ja-JP" altLang="en-US">
                           <a:solidFill>
                             <a:srgbClr val="262626"/>
                           </a:solidFill>
@@ -42727,7 +42727,7 @@
                         <a:buNone/>
                       </a:pPr>
                       <a:r>
-                        <a:rPr sz="1100" b="0">
+                        <a:rPr sz="1100" b="0" lang="ja-JP" altLang="en-US">
                           <a:solidFill>
                             <a:srgbClr val="1A1A1A"/>
                           </a:solidFill>
@@ -42768,7 +42768,7 @@
                         <a:buNone/>
                       </a:pPr>
                       <a:r>
-                        <a:rPr sz="1100" b="1">
+                        <a:rPr sz="1100" b="1" lang="ja-JP" altLang="en-US">
                           <a:solidFill>
                             <a:srgbClr val="046A38"/>
                           </a:solidFill>
@@ -42811,7 +42811,7 @@
                         <a:buNone/>
                       </a:pPr>
                       <a:r>
-                        <a:rPr sz="1100" b="1">
+                        <a:rPr sz="1100" b="1" lang="ja-JP" altLang="en-US">
                           <a:solidFill>
                             <a:srgbClr val="262626"/>
                           </a:solidFill>
@@ -42852,7 +42852,7 @@
                         <a:buNone/>
                       </a:pPr>
                       <a:r>
-                        <a:rPr sz="1100" b="0">
+                        <a:rPr sz="1100" b="0" lang="ja-JP" altLang="en-US">
                           <a:solidFill>
                             <a:srgbClr val="262626"/>
                           </a:solidFill>
@@ -42893,7 +42893,7 @@
                         <a:buNone/>
                       </a:pPr>
                       <a:r>
-                        <a:rPr sz="1100" b="0">
+                        <a:rPr sz="1100" b="0" lang="ja-JP" altLang="en-US">
                           <a:solidFill>
                             <a:srgbClr val="1A1A1A"/>
                           </a:solidFill>
@@ -42934,7 +42934,7 @@
                         <a:buNone/>
                       </a:pPr>
                       <a:r>
-                        <a:rPr sz="1100" b="1">
+                        <a:rPr sz="1100" b="1" lang="ja-JP" altLang="en-US">
                           <a:solidFill>
                             <a:srgbClr val="046A38"/>
                           </a:solidFill>
@@ -42977,7 +42977,7 @@
                         <a:buNone/>
                       </a:pPr>
                       <a:r>
-                        <a:rPr sz="1100" b="1">
+                        <a:rPr sz="1100" b="1" lang="ja-JP" altLang="en-US">
                           <a:solidFill>
                             <a:srgbClr val="262626"/>
                           </a:solidFill>
@@ -43018,7 +43018,7 @@
                         <a:buNone/>
                       </a:pPr>
                       <a:r>
-                        <a:rPr sz="1100" b="0">
+                        <a:rPr sz="1100" b="0" lang="ja-JP" altLang="en-US">
                           <a:solidFill>
                             <a:srgbClr val="262626"/>
                           </a:solidFill>
@@ -43059,7 +43059,7 @@
                         <a:buNone/>
                       </a:pPr>
                       <a:r>
-                        <a:rPr sz="1100" b="0">
+                        <a:rPr sz="1100" b="0" lang="ja-JP" altLang="en-US">
                           <a:solidFill>
                             <a:srgbClr val="1A1A1A"/>
                           </a:solidFill>
@@ -43100,7 +43100,7 @@
                         <a:buNone/>
                       </a:pPr>
                       <a:r>
-                        <a:rPr sz="1100" b="1">
+                        <a:rPr sz="1100" b="1" lang="ja-JP" altLang="en-US">
                           <a:solidFill>
                             <a:srgbClr val="046A38"/>
                           </a:solidFill>
@@ -43143,7 +43143,7 @@
                         <a:buNone/>
                       </a:pPr>
                       <a:r>
-                        <a:rPr sz="1100" b="1">
+                        <a:rPr sz="1100" b="1" lang="ja-JP" altLang="en-US">
                           <a:solidFill>
                             <a:srgbClr val="262626"/>
                           </a:solidFill>
@@ -43184,7 +43184,7 @@
                         <a:buNone/>
                       </a:pPr>
                       <a:r>
-                        <a:rPr sz="1100" b="0">
+                        <a:rPr sz="1100" b="0" lang="ja-JP" altLang="en-US">
                           <a:solidFill>
                             <a:srgbClr val="262626"/>
                           </a:solidFill>
@@ -43225,7 +43225,7 @@
                         <a:buNone/>
                       </a:pPr>
                       <a:r>
-                        <a:rPr sz="1100" b="0">
+                        <a:rPr sz="1100" b="0" lang="ja-JP" altLang="en-US">
                           <a:solidFill>
                             <a:srgbClr val="1A1A1A"/>
                           </a:solidFill>
@@ -43266,7 +43266,7 @@
                         <a:buNone/>
                       </a:pPr>
                       <a:r>
-                        <a:rPr sz="1100" b="1">
+                        <a:rPr sz="1100" b="1" lang="ja-JP" altLang="en-US">
                           <a:solidFill>
                             <a:srgbClr val="046A38"/>
                           </a:solidFill>
@@ -43309,7 +43309,7 @@
                         <a:buNone/>
                       </a:pPr>
                       <a:r>
-                        <a:rPr sz="1100" b="1">
+                        <a:rPr sz="1100" b="1" lang="ja-JP" altLang="en-US">
                           <a:solidFill>
                             <a:srgbClr val="262626"/>
                           </a:solidFill>
@@ -43350,7 +43350,7 @@
                         <a:buNone/>
                       </a:pPr>
                       <a:r>
-                        <a:rPr sz="1100" b="0">
+                        <a:rPr sz="1100" b="0" lang="ja-JP" altLang="en-US">
                           <a:solidFill>
                             <a:srgbClr val="262626"/>
                           </a:solidFill>
@@ -43391,7 +43391,7 @@
                         <a:buNone/>
                       </a:pPr>
                       <a:r>
-                        <a:rPr sz="1100" b="0">
+                        <a:rPr sz="1100" b="0" lang="ja-JP" altLang="en-US">
                           <a:solidFill>
                             <a:srgbClr val="1A1A1A"/>
                           </a:solidFill>
@@ -43432,7 +43432,7 @@
                         <a:buNone/>
                       </a:pPr>
                       <a:r>
-                        <a:rPr sz="1100" b="1">
+                        <a:rPr sz="1100" b="1" lang="ja-JP" altLang="en-US">
                           <a:solidFill>
                             <a:srgbClr val="046A38"/>
                           </a:solidFill>
@@ -43475,7 +43475,7 @@
                         <a:buNone/>
                       </a:pPr>
                       <a:r>
-                        <a:rPr sz="1100" b="1">
+                        <a:rPr sz="1100" b="1" lang="ja-JP" altLang="en-US">
                           <a:solidFill>
                             <a:srgbClr val="262626"/>
                           </a:solidFill>
@@ -43516,7 +43516,7 @@
                         <a:buNone/>
                       </a:pPr>
                       <a:r>
-                        <a:rPr sz="1100" b="0">
+                        <a:rPr sz="1100" b="0" lang="ja-JP" altLang="en-US">
                           <a:solidFill>
                             <a:srgbClr val="262626"/>
                           </a:solidFill>
@@ -43555,7 +43555,7 @@
                         <a:buNone/>
                       </a:pPr>
                       <a:r>
-                        <a:rPr sz="1100" b="0">
+                        <a:rPr sz="1100" b="0" lang="ja-JP" altLang="en-US">
                           <a:solidFill>
                             <a:srgbClr val="1A1A1A"/>
                           </a:solidFill>
@@ -43594,7 +43594,7 @@
                         <a:buNone/>
                       </a:pPr>
                       <a:r>
-                        <a:rPr sz="1100" b="0">
+                        <a:rPr sz="1100" b="0" lang="ja-JP" altLang="en-US">
                           <a:solidFill>
                             <a:srgbClr val="8C8C8C"/>
                           </a:solidFill>
@@ -43635,7 +43635,7 @@
                         <a:buNone/>
                       </a:pPr>
                       <a:r>
-                        <a:rPr sz="1100" b="1">
+                        <a:rPr sz="1100" b="1" lang="ja-JP" altLang="en-US">
                           <a:solidFill>
                             <a:srgbClr val="262626"/>
                           </a:solidFill>
@@ -43676,7 +43676,7 @@
                         <a:buNone/>
                       </a:pPr>
                       <a:r>
-                        <a:rPr sz="1100" b="0">
+                        <a:rPr sz="1100" b="0" lang="ja-JP" altLang="en-US">
                           <a:solidFill>
                             <a:srgbClr val="262626"/>
                           </a:solidFill>
@@ -43715,7 +43715,7 @@
                         <a:buNone/>
                       </a:pPr>
                       <a:r>
-                        <a:rPr sz="1100" b="0">
+                        <a:rPr sz="1100" b="0" lang="ja-JP" altLang="en-US">
                           <a:solidFill>
                             <a:srgbClr val="1A1A1A"/>
                           </a:solidFill>
@@ -43754,7 +43754,7 @@
                         <a:buNone/>
                       </a:pPr>
                       <a:r>
-                        <a:rPr sz="1100" b="0">
+                        <a:rPr sz="1100" b="0" lang="ja-JP" altLang="en-US">
                           <a:solidFill>
                             <a:srgbClr val="8C8C8C"/>
                           </a:solidFill>
@@ -43795,7 +43795,7 @@
                         <a:buNone/>
                       </a:pPr>
                       <a:r>
-                        <a:rPr sz="1100" b="1">
+                        <a:rPr sz="1100" b="1" lang="ja-JP" altLang="en-US">
                           <a:solidFill>
                             <a:srgbClr val="262626"/>
                           </a:solidFill>
@@ -43836,7 +43836,7 @@
                         <a:buNone/>
                       </a:pPr>
                       <a:r>
-                        <a:rPr sz="1100" b="0">
+                        <a:rPr sz="1100" b="0" lang="ja-JP" altLang="en-US">
                           <a:solidFill>
                             <a:srgbClr val="262626"/>
                           </a:solidFill>
@@ -43877,7 +43877,7 @@
                         <a:buNone/>
                       </a:pPr>
                       <a:r>
-                        <a:rPr sz="1100" b="0">
+                        <a:rPr sz="1100" b="0" lang="ja-JP" altLang="en-US">
                           <a:solidFill>
                             <a:srgbClr val="1A1A1A"/>
                           </a:solidFill>
@@ -43918,7 +43918,7 @@
                         <a:buNone/>
                       </a:pPr>
                       <a:r>
-                        <a:rPr sz="1100" b="1">
+                        <a:rPr sz="1100" b="1" lang="ja-JP" altLang="en-US">
                           <a:solidFill>
                             <a:srgbClr val="046A38"/>
                           </a:solidFill>
@@ -43961,7 +43961,7 @@
                         <a:buNone/>
                       </a:pPr>
                       <a:r>
-                        <a:rPr sz="1100" b="1">
+                        <a:rPr sz="1100" b="1" lang="ja-JP" altLang="en-US">
                           <a:solidFill>
                             <a:srgbClr val="262626"/>
                           </a:solidFill>
@@ -44002,7 +44002,7 @@
                         <a:buNone/>
                       </a:pPr>
                       <a:r>
-                        <a:rPr sz="1100" b="0">
+                        <a:rPr sz="1100" b="0" lang="ja-JP" altLang="en-US">
                           <a:solidFill>
                             <a:srgbClr val="262626"/>
                           </a:solidFill>
@@ -44043,7 +44043,7 @@
                         <a:buNone/>
                       </a:pPr>
                       <a:r>
-                        <a:rPr sz="1100" b="0">
+                        <a:rPr sz="1100" b="0" lang="ja-JP" altLang="en-US">
                           <a:solidFill>
                             <a:srgbClr val="1A1A1A"/>
                           </a:solidFill>
@@ -44084,7 +44084,7 @@
                         <a:buNone/>
                       </a:pPr>
                       <a:r>
-                        <a:rPr sz="1100" b="1">
+                        <a:rPr sz="1100" b="1" lang="ja-JP" altLang="en-US">
                           <a:solidFill>
                             <a:srgbClr val="046A38"/>
                           </a:solidFill>
@@ -44127,7 +44127,7 @@
                         <a:buNone/>
                       </a:pPr>
                       <a:r>
-                        <a:rPr sz="1100" b="1">
+                        <a:rPr sz="1100" b="1" lang="ja-JP" altLang="en-US">
                           <a:solidFill>
                             <a:srgbClr val="262626"/>
                           </a:solidFill>
@@ -44168,7 +44168,7 @@
                         <a:buNone/>
                       </a:pPr>
                       <a:r>
-                        <a:rPr sz="1100" b="0">
+                        <a:rPr sz="1100" b="0" lang="ja-JP" altLang="en-US">
                           <a:solidFill>
                             <a:srgbClr val="262626"/>
                           </a:solidFill>
@@ -44209,7 +44209,7 @@
                         <a:buNone/>
                       </a:pPr>
                       <a:r>
-                        <a:rPr sz="1100" b="0">
+                        <a:rPr sz="1100" b="0" lang="ja-JP" altLang="en-US">
                           <a:solidFill>
                             <a:srgbClr val="1A1A1A"/>
                           </a:solidFill>
@@ -44250,7 +44250,7 @@
                         <a:buNone/>
                       </a:pPr>
                       <a:r>
-                        <a:rPr sz="1100" b="1">
+                        <a:rPr sz="1100" b="1" lang="ja-JP" altLang="en-US">
                           <a:solidFill>
                             <a:srgbClr val="046A38"/>
                           </a:solidFill>
@@ -44293,7 +44293,7 @@
                         <a:buNone/>
                       </a:pPr>
                       <a:r>
-                        <a:rPr sz="1100" b="1">
+                        <a:rPr sz="1100" b="1" lang="ja-JP" altLang="en-US">
                           <a:solidFill>
                             <a:srgbClr val="262626"/>
                           </a:solidFill>
@@ -44334,7 +44334,7 @@
                         <a:buNone/>
                       </a:pPr>
                       <a:r>
-                        <a:rPr sz="1100" b="0">
+                        <a:rPr sz="1100" b="0" lang="ja-JP" altLang="en-US">
                           <a:solidFill>
                             <a:srgbClr val="262626"/>
                           </a:solidFill>
@@ -44373,7 +44373,7 @@
                         <a:buNone/>
                       </a:pPr>
                       <a:r>
-                        <a:rPr sz="1100" b="0">
+                        <a:rPr sz="1100" b="0" lang="ja-JP" altLang="en-US">
                           <a:solidFill>
                             <a:srgbClr val="1A1A1A"/>
                           </a:solidFill>
@@ -44412,7 +44412,7 @@
                         <a:buNone/>
                       </a:pPr>
                       <a:r>
-                        <a:rPr sz="1100" b="0">
+                        <a:rPr sz="1100" b="0" lang="ja-JP" altLang="en-US">
                           <a:solidFill>
                             <a:srgbClr val="8C8C8C"/>
                           </a:solidFill>
@@ -44453,7 +44453,7 @@
                         <a:buNone/>
                       </a:pPr>
                       <a:r>
-                        <a:rPr sz="1100" b="1">
+                        <a:rPr sz="1100" b="1" lang="ja-JP" altLang="en-US">
                           <a:solidFill>
                             <a:srgbClr val="262626"/>
                           </a:solidFill>
@@ -44494,7 +44494,7 @@
                         <a:buNone/>
                       </a:pPr>
                       <a:r>
-                        <a:rPr sz="1100" b="0">
+                        <a:rPr sz="1100" b="0" lang="ja-JP" altLang="en-US">
                           <a:solidFill>
                             <a:srgbClr val="262626"/>
                           </a:solidFill>
@@ -44533,7 +44533,7 @@
                         <a:buNone/>
                       </a:pPr>
                       <a:r>
-                        <a:rPr sz="1100" b="0">
+                        <a:rPr sz="1100" b="0" lang="ja-JP" altLang="en-US">
                           <a:solidFill>
                             <a:srgbClr val="1A1A1A"/>
                           </a:solidFill>
@@ -44572,7 +44572,7 @@
                         <a:buNone/>
                       </a:pPr>
                       <a:r>
-                        <a:rPr sz="1100" b="0">
+                        <a:rPr sz="1100" b="0" lang="ja-JP" altLang="en-US">
                           <a:solidFill>
                             <a:srgbClr val="8C8C8C"/>
                           </a:solidFill>
@@ -44613,7 +44613,7 @@
                         <a:buNone/>
                       </a:pPr>
                       <a:r>
-                        <a:rPr sz="1100" b="1">
+                        <a:rPr sz="1100" b="1" lang="ja-JP" altLang="en-US">
                           <a:solidFill>
                             <a:srgbClr val="262626"/>
                           </a:solidFill>
@@ -44654,7 +44654,7 @@
                         <a:buNone/>
                       </a:pPr>
                       <a:r>
-                        <a:rPr sz="1100" b="0">
+                        <a:rPr sz="1100" b="0" lang="ja-JP" altLang="en-US">
                           <a:solidFill>
                             <a:srgbClr val="262626"/>
                           </a:solidFill>
@@ -44693,7 +44693,7 @@
                         <a:buNone/>
                       </a:pPr>
                       <a:r>
-                        <a:rPr sz="1100" b="0">
+                        <a:rPr sz="1100" b="0" lang="ja-JP" altLang="en-US">
                           <a:solidFill>
                             <a:srgbClr val="1A1A1A"/>
                           </a:solidFill>
@@ -44732,7 +44732,7 @@
                         <a:buNone/>
                       </a:pPr>
                       <a:r>
-                        <a:rPr sz="1100" b="0">
+                        <a:rPr sz="1100" b="0" lang="ja-JP" altLang="en-US">
                           <a:solidFill>
                             <a:srgbClr val="8C8C8C"/>
                           </a:solidFill>
@@ -44773,7 +44773,7 @@
                         <a:buNone/>
                       </a:pPr>
                       <a:r>
-                        <a:rPr sz="1100" b="1">
+                        <a:rPr sz="1100" b="1" lang="ja-JP" altLang="en-US">
                           <a:solidFill>
                             <a:srgbClr val="262626"/>
                           </a:solidFill>
@@ -44789,7 +44789,7 @@
                         <a:buNone/>
                       </a:pPr>
                       <a:r>
-                        <a:rPr sz="1100" b="1">
+                        <a:rPr sz="1100" b="1" lang="ja-JP" altLang="en-US">
                           <a:solidFill>
                             <a:srgbClr val="262626"/>
                           </a:solidFill>
@@ -44830,7 +44830,7 @@
                         <a:buNone/>
                       </a:pPr>
                       <a:r>
-                        <a:rPr sz="1100" b="0">
+                        <a:rPr sz="1100" b="0" lang="ja-JP" altLang="en-US">
                           <a:solidFill>
                             <a:srgbClr val="262626"/>
                           </a:solidFill>
@@ -44871,7 +44871,7 @@
                         <a:buNone/>
                       </a:pPr>
                       <a:r>
-                        <a:rPr sz="1100" b="0">
+                        <a:rPr sz="1100" b="0" lang="ja-JP" altLang="en-US">
                           <a:solidFill>
                             <a:srgbClr val="1A1A1A"/>
                           </a:solidFill>
@@ -44879,7 +44879,7 @@
                         <a:t>外部データの拡充と取得の流れ</a:t>
                       </a:r>
                       <a:r>
-                        <a:rPr sz="950" b="1">
+                        <a:rPr sz="950" b="1" lang="ja-JP" altLang="en-US">
                           <a:solidFill>
                             <a:srgbClr val="046A38"/>
                           </a:solidFill>
@@ -44920,7 +44920,7 @@
                         <a:buNone/>
                       </a:pPr>
                       <a:r>
-                        <a:rPr sz="1100" b="1">
+                        <a:rPr sz="1100" b="1" lang="ja-JP" altLang="en-US">
                           <a:solidFill>
                             <a:srgbClr val="046A38"/>
                           </a:solidFill>
@@ -44963,7 +44963,7 @@
                         <a:buNone/>
                       </a:pPr>
                       <a:r>
-                        <a:rPr sz="1100" b="1">
+                        <a:rPr sz="1100" b="1" lang="ja-JP" altLang="en-US">
                           <a:solidFill>
                             <a:srgbClr val="262626"/>
                           </a:solidFill>
@@ -45004,7 +45004,7 @@
                         <a:buNone/>
                       </a:pPr>
                       <a:r>
-                        <a:rPr sz="1100" b="0">
+                        <a:rPr sz="1100" b="0" lang="ja-JP" altLang="en-US">
                           <a:solidFill>
                             <a:srgbClr val="262626"/>
                           </a:solidFill>
@@ -45045,7 +45045,7 @@
                         <a:buNone/>
                       </a:pPr>
                       <a:r>
-                        <a:rPr sz="1100" b="0">
+                        <a:rPr sz="1100" b="0" lang="ja-JP" altLang="en-US">
                           <a:solidFill>
                             <a:srgbClr val="1A1A1A"/>
                           </a:solidFill>
@@ -45053,7 +45053,7 @@
                         <a:t>読み込みの高速化・全画面の点検</a:t>
                       </a:r>
                       <a:r>
-                        <a:rPr sz="950" b="1">
+                        <a:rPr sz="950" b="1" lang="ja-JP" altLang="en-US">
                           <a:solidFill>
                             <a:srgbClr val="046A38"/>
                           </a:solidFill>
@@ -45094,7 +45094,7 @@
                         <a:buNone/>
                       </a:pPr>
                       <a:r>
-                        <a:rPr sz="1100" b="1">
+                        <a:rPr sz="1100" b="1" lang="ja-JP" altLang="en-US">
                           <a:solidFill>
                             <a:srgbClr val="046A38"/>
                           </a:solidFill>
@@ -45154,7 +45154,7 @@
               <a:buNone/>
             </a:pPr>
             <a:r>
-              <a:rPr sz="1000" b="0">
+              <a:rPr sz="1000" b="0" lang="ja-JP" altLang="en-US">
                 <a:solidFill>
                   <a:srgbClr val="C9D9CE"/>
                 </a:solidFill>
@@ -45162,7 +45162,7 @@
               <a:t>■</a:t>
             </a:r>
             <a:r>
-              <a:rPr sz="1000" b="0">
+              <a:rPr sz="1000" b="0" lang="ja-JP" altLang="en-US">
                 <a:solidFill>
                   <a:srgbClr val="595959"/>
                 </a:solidFill>
@@ -45229,7 +45229,7 @@
               <a:buNone/>
             </a:pPr>
             <a:r>
-              <a:rPr sz="2800" b="1">
+              <a:rPr sz="2800" b="1" lang="ja-JP" altLang="en-US">
                 <a:solidFill>
                   <a:srgbClr val="046A38"/>
                 </a:solidFill>
@@ -45237,7 +45237,7 @@
               <a:t>62</a:t>
             </a:r>
             <a:r>
-              <a:rPr sz="1200" b="1">
+              <a:rPr sz="1200" b="1" lang="ja-JP" altLang="en-US">
                 <a:solidFill>
                   <a:srgbClr val="046A38"/>
                 </a:solidFill>
@@ -45273,7 +45273,7 @@
               <a:buNone/>
             </a:pPr>
             <a:r>
-              <a:rPr sz="1000" b="0">
+              <a:rPr sz="1000" b="0" lang="ja-JP" altLang="en-US">
                 <a:solidFill>
                   <a:srgbClr val="595959"/>
                 </a:solidFill>
@@ -45286,7 +45286,7 @@
               <a:buNone/>
             </a:pPr>
             <a:r>
-              <a:rPr sz="1000" b="1">
+              <a:rPr sz="1000" b="1" lang="ja-JP" altLang="en-US">
                 <a:solidFill>
                   <a:srgbClr val="262626"/>
                 </a:solidFill>
@@ -45353,7 +45353,7 @@
               <a:buNone/>
             </a:pPr>
             <a:r>
-              <a:rPr sz="2800" b="1">
+              <a:rPr sz="2800" b="1" lang="ja-JP" altLang="en-US">
                 <a:solidFill>
                   <a:srgbClr val="046A38"/>
                 </a:solidFill>
@@ -45361,7 +45361,7 @@
               <a:t>17</a:t>
             </a:r>
             <a:r>
-              <a:rPr sz="1200" b="1">
+              <a:rPr sz="1200" b="1" lang="ja-JP" altLang="en-US">
                 <a:solidFill>
                   <a:srgbClr val="046A38"/>
                 </a:solidFill>
@@ -45397,7 +45397,7 @@
               <a:buNone/>
             </a:pPr>
             <a:r>
-              <a:rPr sz="1000" b="0">
+              <a:rPr sz="1000" b="0" lang="ja-JP" altLang="en-US">
                 <a:solidFill>
                   <a:srgbClr val="595959"/>
                 </a:solidFill>
@@ -45410,7 +45410,7 @@
               <a:buNone/>
             </a:pPr>
             <a:r>
-              <a:rPr sz="1000" b="1">
+              <a:rPr sz="1000" b="1" lang="ja-JP" altLang="en-US">
                 <a:solidFill>
                   <a:srgbClr val="262626"/>
                 </a:solidFill>
@@ -45446,7 +45446,7 @@
               <a:buNone/>
             </a:pPr>
             <a:r>
-              <a:rPr sz="1300" b="1">
+              <a:rPr sz="1300" b="1" lang="ja-JP" altLang="en-US">
                 <a:solidFill>
                   <a:srgbClr val="262626"/>
                 </a:solidFill>
@@ -45487,7 +45487,7 @@
               <a:buNone/>
             </a:pPr>
             <a:r>
-              <a:rPr sz="1050" b="1">
+              <a:rPr sz="1050" b="1" lang="ja-JP" altLang="en-US">
                 <a:solidFill>
                   <a:srgbClr val="FFFFFF"/>
                 </a:solidFill>
@@ -45523,7 +45523,7 @@
               <a:buNone/>
             </a:pPr>
             <a:r>
-              <a:rPr sz="1200" b="1">
+              <a:rPr sz="1200" b="1" lang="ja-JP" altLang="en-US">
                 <a:solidFill>
                   <a:srgbClr val="262626"/>
                 </a:solidFill>
@@ -45559,7 +45559,7 @@
               <a:buNone/>
             </a:pPr>
             <a:r>
-              <a:rPr sz="950" b="0">
+              <a:rPr sz="950" b="0" lang="ja-JP" altLang="en-US">
                 <a:solidFill>
                   <a:srgbClr val="8C8C8C"/>
                 </a:solidFill>
@@ -45598,7 +45598,7 @@
               <a:buNone/>
             </a:pPr>
             <a:r>
-              <a:rPr sz="1050" b="0">
+              <a:rPr sz="1050" b="0" lang="ja-JP" altLang="en-US">
                 <a:solidFill>
                   <a:srgbClr val="595959"/>
                 </a:solidFill>
@@ -45660,7 +45660,7 @@
               <a:buNone/>
             </a:pPr>
             <a:r>
-              <a:rPr sz="1050" b="1">
+              <a:rPr sz="1050" b="1" lang="ja-JP" altLang="en-US">
                 <a:solidFill>
                   <a:srgbClr val="FFFFFF"/>
                 </a:solidFill>
@@ -45696,7 +45696,7 @@
               <a:buNone/>
             </a:pPr>
             <a:r>
-              <a:rPr sz="1200" b="1">
+              <a:rPr sz="1200" b="1" lang="ja-JP" altLang="en-US">
                 <a:solidFill>
                   <a:srgbClr val="262626"/>
                 </a:solidFill>
@@ -45732,7 +45732,7 @@
               <a:buNone/>
             </a:pPr>
             <a:r>
-              <a:rPr sz="950" b="0">
+              <a:rPr sz="950" b="0" lang="ja-JP" altLang="en-US">
                 <a:solidFill>
                   <a:srgbClr val="8C8C8C"/>
                 </a:solidFill>
@@ -45771,7 +45771,7 @@
               <a:buNone/>
             </a:pPr>
             <a:r>
-              <a:rPr sz="1050" b="0">
+              <a:rPr sz="1050" b="0" lang="ja-JP" altLang="en-US">
                 <a:solidFill>
                   <a:srgbClr val="595959"/>
                 </a:solidFill>
@@ -45833,7 +45833,7 @@
               <a:buNone/>
             </a:pPr>
             <a:r>
-              <a:rPr sz="1050" b="1">
+              <a:rPr sz="1050" b="1" lang="ja-JP" altLang="en-US">
                 <a:solidFill>
                   <a:srgbClr val="FFFFFF"/>
                 </a:solidFill>
@@ -45869,7 +45869,7 @@
               <a:buNone/>
             </a:pPr>
             <a:r>
-              <a:rPr sz="1200" b="1">
+              <a:rPr sz="1200" b="1" lang="ja-JP" altLang="en-US">
                 <a:solidFill>
                   <a:srgbClr val="262626"/>
                 </a:solidFill>
@@ -45905,7 +45905,7 @@
               <a:buNone/>
             </a:pPr>
             <a:r>
-              <a:rPr sz="950" b="0">
+              <a:rPr sz="950" b="0" lang="ja-JP" altLang="en-US">
                 <a:solidFill>
                   <a:srgbClr val="8C8C8C"/>
                 </a:solidFill>
@@ -45944,7 +45944,7 @@
               <a:buNone/>
             </a:pPr>
             <a:r>
-              <a:rPr sz="1050" b="0">
+              <a:rPr sz="1050" b="0" lang="ja-JP" altLang="en-US">
                 <a:solidFill>
                   <a:srgbClr val="595959"/>
                 </a:solidFill>
@@ -46006,7 +46006,7 @@
               <a:buNone/>
             </a:pPr>
             <a:r>
-              <a:rPr sz="1050" b="1">
+              <a:rPr sz="1050" b="1" lang="ja-JP" altLang="en-US">
                 <a:solidFill>
                   <a:srgbClr val="FFFFFF"/>
                 </a:solidFill>
@@ -46042,7 +46042,7 @@
               <a:buNone/>
             </a:pPr>
             <a:r>
-              <a:rPr sz="1200" b="1">
+              <a:rPr sz="1200" b="1" lang="ja-JP" altLang="en-US">
                 <a:solidFill>
                   <a:srgbClr val="262626"/>
                 </a:solidFill>
@@ -46078,7 +46078,7 @@
               <a:buNone/>
             </a:pPr>
             <a:r>
-              <a:rPr sz="950" b="0">
+              <a:rPr sz="950" b="0" lang="ja-JP" altLang="en-US">
                 <a:solidFill>
                   <a:srgbClr val="8C8C8C"/>
                 </a:solidFill>
@@ -46117,7 +46117,7 @@
               <a:buNone/>
             </a:pPr>
             <a:r>
-              <a:rPr sz="1050" b="0">
+              <a:rPr sz="1050" b="0" lang="ja-JP" altLang="en-US">
                 <a:solidFill>
                   <a:srgbClr val="595959"/>
                 </a:solidFill>
@@ -46179,7 +46179,7 @@
               <a:buNone/>
             </a:pPr>
             <a:r>
-              <a:rPr sz="1050" b="1">
+              <a:rPr sz="1050" b="1" lang="ja-JP" altLang="en-US">
                 <a:solidFill>
                   <a:srgbClr val="FFFFFF"/>
                 </a:solidFill>
@@ -46215,7 +46215,7 @@
               <a:buNone/>
             </a:pPr>
             <a:r>
-              <a:rPr sz="1200" b="1">
+              <a:rPr sz="1200" b="1" lang="ja-JP" altLang="en-US">
                 <a:solidFill>
                   <a:srgbClr val="262626"/>
                 </a:solidFill>
@@ -46251,7 +46251,7 @@
               <a:buNone/>
             </a:pPr>
             <a:r>
-              <a:rPr sz="950" b="0">
+              <a:rPr sz="950" b="0" lang="ja-JP" altLang="en-US">
                 <a:solidFill>
                   <a:srgbClr val="8C8C8C"/>
                 </a:solidFill>
@@ -46290,7 +46290,7 @@
               <a:buNone/>
             </a:pPr>
             <a:r>
-              <a:rPr sz="1050" b="0">
+              <a:rPr sz="1050" b="0" lang="ja-JP" altLang="en-US">
                 <a:solidFill>
                   <a:srgbClr val="595959"/>
                 </a:solidFill>
@@ -46511,7 +46511,7 @@
               <a:buNone/>
             </a:pPr>
             <a:r>
-              <a:rPr sz="4000" b="1">
+              <a:rPr sz="4000" b="1" lang="ja-JP" altLang="en-US">
                 <a:solidFill>
                   <a:srgbClr val="046A38"/>
                 </a:solidFill>
@@ -46519,7 +46519,7 @@
               <a:t>57</a:t>
             </a:r>
             <a:r>
-              <a:rPr sz="2000" b="1">
+              <a:rPr sz="2000" b="1" lang="ja-JP" altLang="en-US">
                 <a:solidFill>
                   <a:srgbClr val="046A38"/>
                 </a:solidFill>
@@ -46555,7 +46555,7 @@
               <a:buNone/>
             </a:pPr>
             <a:r>
-              <a:rPr sz="1300" b="1">
+              <a:rPr sz="1300" b="1" lang="ja-JP" altLang="en-US">
                 <a:solidFill>
                   <a:srgbClr val="262626"/>
                 </a:solidFill>
@@ -46571,7 +46571,7 @@
               <a:buNone/>
             </a:pPr>
             <a:r>
-              <a:rPr sz="1050" b="0">
+              <a:rPr sz="1050" b="0" lang="ja-JP" altLang="en-US">
                 <a:solidFill>
                   <a:srgbClr val="595959"/>
                 </a:solidFill>
@@ -46607,7 +46607,7 @@
               <a:buNone/>
             </a:pPr>
             <a:r>
-              <a:rPr sz="1200" b="1">
+              <a:rPr sz="1200" b="1" lang="ja-JP" altLang="en-US">
                 <a:solidFill>
                   <a:srgbClr val="262626"/>
                 </a:solidFill>
@@ -46661,7 +46661,7 @@
               <a:buNone/>
             </a:pPr>
             <a:r>
-              <a:rPr sz="1200" b="1">
+              <a:rPr sz="1200" b="1" lang="ja-JP" altLang="en-US">
                 <a:solidFill>
                   <a:srgbClr val="262626"/>
                 </a:solidFill>
@@ -46718,7 +46718,7 @@
               <a:buNone/>
             </a:pPr>
             <a:r>
-              <a:rPr sz="2000" b="1">
+              <a:rPr sz="2000" b="1" lang="ja-JP" altLang="en-US">
                 <a:solidFill>
                   <a:srgbClr val="046A38"/>
                 </a:solidFill>
@@ -46726,7 +46726,7 @@
               <a:t>123</a:t>
             </a:r>
             <a:r>
-              <a:rPr sz="1050" b="1">
+              <a:rPr sz="1050" b="1" lang="ja-JP" altLang="en-US">
                 <a:solidFill>
                   <a:srgbClr val="046A38"/>
                 </a:solidFill>
@@ -46762,7 +46762,7 @@
               <a:buNone/>
             </a:pPr>
             <a:r>
-              <a:rPr sz="1100" b="1">
+              <a:rPr sz="1100" b="1" lang="ja-JP" altLang="en-US">
                 <a:solidFill>
                   <a:srgbClr val="262626"/>
                 </a:solidFill>
@@ -46798,7 +46798,7 @@
               <a:buNone/>
             </a:pPr>
             <a:r>
-              <a:rPr sz="1000" b="0">
+              <a:rPr sz="1000" b="0" lang="ja-JP" altLang="en-US">
                 <a:solidFill>
                   <a:srgbClr val="595959"/>
                 </a:solidFill>
@@ -46855,7 +46855,7 @@
               <a:buNone/>
             </a:pPr>
             <a:r>
-              <a:rPr sz="2000" b="1">
+              <a:rPr sz="2000" b="1" lang="ja-JP" altLang="en-US">
                 <a:solidFill>
                   <a:srgbClr val="046A38"/>
                 </a:solidFill>
@@ -46863,7 +46863,7 @@
               <a:t>72</a:t>
             </a:r>
             <a:r>
-              <a:rPr sz="1050" b="1">
+              <a:rPr sz="1050" b="1" lang="ja-JP" altLang="en-US">
                 <a:solidFill>
                   <a:srgbClr val="046A38"/>
                 </a:solidFill>
@@ -46899,7 +46899,7 @@
               <a:buNone/>
             </a:pPr>
             <a:r>
-              <a:rPr sz="1100" b="1">
+              <a:rPr sz="1100" b="1" lang="ja-JP" altLang="en-US">
                 <a:solidFill>
                   <a:srgbClr val="262626"/>
                 </a:solidFill>
@@ -46935,7 +46935,7 @@
               <a:buNone/>
             </a:pPr>
             <a:r>
-              <a:rPr sz="1000" b="0">
+              <a:rPr sz="1000" b="0" lang="ja-JP" altLang="en-US">
                 <a:solidFill>
                   <a:srgbClr val="595959"/>
                 </a:solidFill>
@@ -46992,7 +46992,7 @@
               <a:buNone/>
             </a:pPr>
             <a:r>
-              <a:rPr sz="2000" b="1">
+              <a:rPr sz="2000" b="1" lang="ja-JP" altLang="en-US">
                 <a:solidFill>
                   <a:srgbClr val="046A38"/>
                 </a:solidFill>
@@ -47000,7 +47000,7 @@
               <a:t>5</a:t>
             </a:r>
             <a:r>
-              <a:rPr sz="1050" b="1">
+              <a:rPr sz="1050" b="1" lang="ja-JP" altLang="en-US">
                 <a:solidFill>
                   <a:srgbClr val="046A38"/>
                 </a:solidFill>
@@ -47036,7 +47036,7 @@
               <a:buNone/>
             </a:pPr>
             <a:r>
-              <a:rPr sz="1100" b="1">
+              <a:rPr sz="1100" b="1" lang="ja-JP" altLang="en-US">
                 <a:solidFill>
                   <a:srgbClr val="262626"/>
                 </a:solidFill>
@@ -47072,7 +47072,7 @@
               <a:buNone/>
             </a:pPr>
             <a:r>
-              <a:rPr sz="1000" b="0">
+              <a:rPr sz="1000" b="0" lang="ja-JP" altLang="en-US">
                 <a:solidFill>
                   <a:srgbClr val="595959"/>
                 </a:solidFill>
@@ -47134,7 +47134,7 @@
               <a:buNone/>
             </a:pPr>
             <a:r>
-              <a:rPr sz="1250" b="1">
+              <a:rPr sz="1250" b="1" lang="ja-JP" altLang="en-US">
                 <a:solidFill>
                   <a:srgbClr val="FFFFFF"/>
                 </a:solidFill>
@@ -47181,7 +47181,7 @@
                         <a:buNone/>
                       </a:pPr>
                       <a:r>
-                        <a:rPr sz="1100" b="1">
+                        <a:rPr sz="1100" b="1" lang="ja-JP" altLang="en-US">
                           <a:solidFill>
                             <a:srgbClr val="595959"/>
                           </a:solidFill>
@@ -47222,7 +47222,7 @@
                         <a:buNone/>
                       </a:pPr>
                       <a:r>
-                        <a:rPr sz="1100" b="1">
+                        <a:rPr sz="1100" b="1" lang="ja-JP" altLang="en-US">
                           <a:solidFill>
                             <a:srgbClr val="595959"/>
                           </a:solidFill>
@@ -47263,7 +47263,7 @@
                         <a:buNone/>
                       </a:pPr>
                       <a:r>
-                        <a:rPr sz="1100" b="1">
+                        <a:rPr sz="1100" b="1" lang="ja-JP" altLang="en-US">
                           <a:solidFill>
                             <a:srgbClr val="595959"/>
                           </a:solidFill>
@@ -47304,7 +47304,7 @@
                         <a:buNone/>
                       </a:pPr>
                       <a:r>
-                        <a:rPr sz="1100" b="1">
+                        <a:rPr sz="1100" b="1" lang="ja-JP" altLang="en-US">
                           <a:solidFill>
                             <a:srgbClr val="595959"/>
                           </a:solidFill>
@@ -47347,7 +47347,7 @@
                         <a:buNone/>
                       </a:pPr>
                       <a:r>
-                        <a:rPr sz="1100" b="1">
+                        <a:rPr sz="1100" b="1" lang="ja-JP" altLang="en-US">
                           <a:solidFill>
                             <a:srgbClr val="8C8C8C"/>
                           </a:solidFill>
@@ -47355,7 +47355,7 @@
                         <a:t>① </a:t>
                       </a:r>
                       <a:r>
-                        <a:rPr sz="1100" b="1">
+                        <a:rPr sz="1100" b="1" lang="ja-JP" altLang="en-US">
                           <a:solidFill>
                             <a:srgbClr val="1A1A1A"/>
                           </a:solidFill>
@@ -47394,7 +47394,7 @@
                         <a:buNone/>
                       </a:pPr>
                       <a:r>
-                        <a:rPr sz="1300" b="1">
+                        <a:rPr sz="1300" b="1" lang="ja-JP" altLang="en-US">
                           <a:solidFill>
                             <a:srgbClr val="046A38"/>
                           </a:solidFill>
@@ -47433,7 +47433,7 @@
                         <a:buNone/>
                       </a:pPr>
                       <a:r>
-                        <a:rPr sz="1050" b="0">
+                        <a:rPr sz="1050" b="0" lang="ja-JP" altLang="en-US">
                           <a:solidFill>
                             <a:srgbClr val="1A1A1A"/>
                           </a:solidFill>
@@ -47472,7 +47472,7 @@
                         <a:buNone/>
                       </a:pPr>
                       <a:r>
-                        <a:rPr sz="1050" b="0">
+                        <a:rPr sz="1050" b="0" lang="ja-JP" altLang="en-US">
                           <a:solidFill>
                             <a:srgbClr val="1A1A1A"/>
                           </a:solidFill>
@@ -47488,7 +47488,7 @@
                         <a:buNone/>
                       </a:pPr>
                       <a:r>
-                        <a:rPr sz="1000" b="0">
+                        <a:rPr sz="1000" b="0" lang="ja-JP" altLang="en-US">
                           <a:solidFill>
                             <a:srgbClr val="8C8C8C"/>
                           </a:solidFill>
@@ -47529,7 +47529,7 @@
                         <a:buNone/>
                       </a:pPr>
                       <a:r>
-                        <a:rPr sz="1100" b="1">
+                        <a:rPr sz="1100" b="1" lang="ja-JP" altLang="en-US">
                           <a:solidFill>
                             <a:srgbClr val="8C8C8C"/>
                           </a:solidFill>
@@ -47537,7 +47537,7 @@
                         <a:t>② </a:t>
                       </a:r>
                       <a:r>
-                        <a:rPr sz="1100" b="1">
+                        <a:rPr sz="1100" b="1" lang="ja-JP" altLang="en-US">
                           <a:solidFill>
                             <a:srgbClr val="1A1A1A"/>
                           </a:solidFill>
@@ -47576,7 +47576,7 @@
                         <a:buNone/>
                       </a:pPr>
                       <a:r>
-                        <a:rPr sz="1300" b="1">
+                        <a:rPr sz="1300" b="1" lang="ja-JP" altLang="en-US">
                           <a:solidFill>
                             <a:srgbClr val="046A38"/>
                           </a:solidFill>
@@ -47615,7 +47615,7 @@
                         <a:buNone/>
                       </a:pPr>
                       <a:r>
-                        <a:rPr sz="1050" b="0">
+                        <a:rPr sz="1050" b="0" lang="ja-JP" altLang="en-US">
                           <a:solidFill>
                             <a:srgbClr val="1A1A1A"/>
                           </a:solidFill>
@@ -47654,7 +47654,7 @@
                         <a:buNone/>
                       </a:pPr>
                       <a:r>
-                        <a:rPr sz="1050" b="0">
+                        <a:rPr sz="1050" b="0" lang="ja-JP" altLang="en-US">
                           <a:solidFill>
                             <a:srgbClr val="1A1A1A"/>
                           </a:solidFill>
@@ -47670,7 +47670,7 @@
                         <a:buNone/>
                       </a:pPr>
                       <a:r>
-                        <a:rPr sz="1000" b="0">
+                        <a:rPr sz="1000" b="0" lang="ja-JP" altLang="en-US">
                           <a:solidFill>
                             <a:srgbClr val="8C8C8C"/>
                           </a:solidFill>
@@ -47711,7 +47711,7 @@
                         <a:buNone/>
                       </a:pPr>
                       <a:r>
-                        <a:rPr sz="1100" b="1">
+                        <a:rPr sz="1100" b="1" lang="ja-JP" altLang="en-US">
                           <a:solidFill>
                             <a:srgbClr val="8C8C8C"/>
                           </a:solidFill>
@@ -47719,7 +47719,7 @@
                         <a:t>③ </a:t>
                       </a:r>
                       <a:r>
-                        <a:rPr sz="1100" b="1">
+                        <a:rPr sz="1100" b="1" lang="ja-JP" altLang="en-US">
                           <a:solidFill>
                             <a:srgbClr val="1A1A1A"/>
                           </a:solidFill>
@@ -47758,7 +47758,7 @@
                         <a:buNone/>
                       </a:pPr>
                       <a:r>
-                        <a:rPr sz="1300" b="1">
+                        <a:rPr sz="1300" b="1" lang="ja-JP" altLang="en-US">
                           <a:solidFill>
                             <a:srgbClr val="046A38"/>
                           </a:solidFill>
@@ -47797,7 +47797,7 @@
                         <a:buNone/>
                       </a:pPr>
                       <a:r>
-                        <a:rPr sz="1050" b="0">
+                        <a:rPr sz="1050" b="0" lang="ja-JP" altLang="en-US">
                           <a:solidFill>
                             <a:srgbClr val="1A1A1A"/>
                           </a:solidFill>
@@ -47836,7 +47836,7 @@
                         <a:buNone/>
                       </a:pPr>
                       <a:r>
-                        <a:rPr sz="1050" b="0">
+                        <a:rPr sz="1050" b="0" lang="ja-JP" altLang="en-US">
                           <a:solidFill>
                             <a:srgbClr val="1A1A1A"/>
                           </a:solidFill>
@@ -47852,7 +47852,7 @@
                         <a:buNone/>
                       </a:pPr>
                       <a:r>
-                        <a:rPr sz="1000" b="0">
+                        <a:rPr sz="1000" b="0" lang="ja-JP" altLang="en-US">
                           <a:solidFill>
                             <a:srgbClr val="8C8C8C"/>
                           </a:solidFill>
@@ -47893,7 +47893,7 @@
                         <a:buNone/>
                       </a:pPr>
                       <a:r>
-                        <a:rPr sz="1100" b="1">
+                        <a:rPr sz="1100" b="1" lang="ja-JP" altLang="en-US">
                           <a:solidFill>
                             <a:srgbClr val="8C8C8C"/>
                           </a:solidFill>
@@ -47901,7 +47901,7 @@
                         <a:t>④ </a:t>
                       </a:r>
                       <a:r>
-                        <a:rPr sz="1100" b="1">
+                        <a:rPr sz="1100" b="1" lang="ja-JP" altLang="en-US">
                           <a:solidFill>
                             <a:srgbClr val="1A1A1A"/>
                           </a:solidFill>
@@ -47940,7 +47940,7 @@
                         <a:buNone/>
                       </a:pPr>
                       <a:r>
-                        <a:rPr sz="1300" b="1">
+                        <a:rPr sz="1300" b="1" lang="ja-JP" altLang="en-US">
                           <a:solidFill>
                             <a:srgbClr val="046A38"/>
                           </a:solidFill>
@@ -47979,7 +47979,7 @@
                         <a:buNone/>
                       </a:pPr>
                       <a:r>
-                        <a:rPr sz="1050" b="0">
+                        <a:rPr sz="1050" b="0" lang="ja-JP" altLang="en-US">
                           <a:solidFill>
                             <a:srgbClr val="1A1A1A"/>
                           </a:solidFill>
@@ -48018,7 +48018,7 @@
                         <a:buNone/>
                       </a:pPr>
                       <a:r>
-                        <a:rPr sz="1050" b="0">
+                        <a:rPr sz="1050" b="0" lang="ja-JP" altLang="en-US">
                           <a:solidFill>
                             <a:srgbClr val="1A1A1A"/>
                           </a:solidFill>
@@ -48034,7 +48034,7 @@
                         <a:buNone/>
                       </a:pPr>
                       <a:r>
-                        <a:rPr sz="1000" b="0">
+                        <a:rPr sz="1000" b="0" lang="ja-JP" altLang="en-US">
                           <a:solidFill>
                             <a:srgbClr val="8C8C8C"/>
                           </a:solidFill>
@@ -48075,7 +48075,7 @@
                         <a:buNone/>
                       </a:pPr>
                       <a:r>
-                        <a:rPr sz="1100" b="1">
+                        <a:rPr sz="1100" b="1" lang="ja-JP" altLang="en-US">
                           <a:solidFill>
                             <a:srgbClr val="8C8C8C"/>
                           </a:solidFill>
@@ -48083,7 +48083,7 @@
                         <a:t>⑤ </a:t>
                       </a:r>
                       <a:r>
-                        <a:rPr sz="1100" b="1">
+                        <a:rPr sz="1100" b="1" lang="ja-JP" altLang="en-US">
                           <a:solidFill>
                             <a:srgbClr val="1A1A1A"/>
                           </a:solidFill>
@@ -48122,7 +48122,7 @@
                         <a:buNone/>
                       </a:pPr>
                       <a:r>
-                        <a:rPr sz="1300" b="1">
+                        <a:rPr sz="1300" b="1" lang="ja-JP" altLang="en-US">
                           <a:solidFill>
                             <a:srgbClr val="046A38"/>
                           </a:solidFill>
@@ -48161,7 +48161,7 @@
                         <a:buNone/>
                       </a:pPr>
                       <a:r>
-                        <a:rPr sz="1050" b="0">
+                        <a:rPr sz="1050" b="0" lang="ja-JP" altLang="en-US">
                           <a:solidFill>
                             <a:srgbClr val="1A1A1A"/>
                           </a:solidFill>
@@ -48200,7 +48200,7 @@
                         <a:buNone/>
                       </a:pPr>
                       <a:r>
-                        <a:rPr sz="1050" b="0">
+                        <a:rPr sz="1050" b="0" lang="ja-JP" altLang="en-US">
                           <a:solidFill>
                             <a:srgbClr val="1A1A1A"/>
                           </a:solidFill>
@@ -48216,7 +48216,7 @@
                         <a:buNone/>
                       </a:pPr>
                       <a:r>
-                        <a:rPr sz="1000" b="0">
+                        <a:rPr sz="1000" b="0" lang="ja-JP" altLang="en-US">
                           <a:solidFill>
                             <a:srgbClr val="8C8C8C"/>
                           </a:solidFill>
@@ -48257,7 +48257,7 @@
                         <a:buNone/>
                       </a:pPr>
                       <a:r>
-                        <a:rPr sz="1100" b="1">
+                        <a:rPr sz="1100" b="1" lang="ja-JP" altLang="en-US">
                           <a:solidFill>
                             <a:srgbClr val="8C8C8C"/>
                           </a:solidFill>
@@ -48265,7 +48265,7 @@
                         <a:t>⑥ </a:t>
                       </a:r>
                       <a:r>
-                        <a:rPr sz="1100" b="1">
+                        <a:rPr sz="1100" b="1" lang="ja-JP" altLang="en-US">
                           <a:solidFill>
                             <a:srgbClr val="1A1A1A"/>
                           </a:solidFill>
@@ -48304,7 +48304,7 @@
                         <a:buNone/>
                       </a:pPr>
                       <a:r>
-                        <a:rPr sz="1300" b="1">
+                        <a:rPr sz="1300" b="1" lang="ja-JP" altLang="en-US">
                           <a:solidFill>
                             <a:srgbClr val="046A38"/>
                           </a:solidFill>
@@ -48343,7 +48343,7 @@
                         <a:buNone/>
                       </a:pPr>
                       <a:r>
-                        <a:rPr sz="1050" b="0">
+                        <a:rPr sz="1050" b="0" lang="ja-JP" altLang="en-US">
                           <a:solidFill>
                             <a:srgbClr val="1A1A1A"/>
                           </a:solidFill>
@@ -48382,7 +48382,7 @@
                         <a:buNone/>
                       </a:pPr>
                       <a:r>
-                        <a:rPr sz="1050" b="0">
+                        <a:rPr sz="1050" b="0" lang="ja-JP" altLang="en-US">
                           <a:solidFill>
                             <a:srgbClr val="1A1A1A"/>
                           </a:solidFill>
@@ -48398,7 +48398,7 @@
                         <a:buNone/>
                       </a:pPr>
                       <a:r>
-                        <a:rPr sz="1000" b="0">
+                        <a:rPr sz="1000" b="0" lang="ja-JP" altLang="en-US">
                           <a:solidFill>
                             <a:srgbClr val="8C8C8C"/>
                           </a:solidFill>
@@ -48456,7 +48456,7 @@
               <a:buNone/>
             </a:pPr>
             <a:r>
-              <a:rPr sz="1000" b="0">
+              <a:rPr sz="1000" b="0" lang="ja-JP" altLang="en-US">
                 <a:solidFill>
                   <a:srgbClr val="595959"/>
                 </a:solidFill>
@@ -48469,7 +48469,7 @@
               <a:buNone/>
             </a:pPr>
             <a:r>
-              <a:rPr sz="1000" b="0">
+              <a:rPr sz="1000" b="0" lang="ja-JP" altLang="en-US">
                 <a:solidFill>
                   <a:srgbClr val="595959"/>
                 </a:solidFill>
@@ -48664,7 +48664,7 @@
               <a:buNone/>
             </a:pPr>
             <a:r>
-              <a:rPr sz="1200" b="1">
+              <a:rPr sz="1200" b="1" lang="ja-JP" altLang="en-US">
                 <a:solidFill>
                   <a:srgbClr val="262626"/>
                 </a:solidFill>
@@ -48680,7 +48680,7 @@
               <a:buNone/>
             </a:pPr>
             <a:r>
-              <a:rPr sz="1000" b="0">
+              <a:rPr sz="1000" b="0" lang="ja-JP" altLang="en-US">
                 <a:solidFill>
                   <a:srgbClr val="595959"/>
                 </a:solidFill>
@@ -48721,7 +48721,7 @@
               <a:buNone/>
             </a:pPr>
             <a:r>
-              <a:rPr sz="1200" b="1">
+              <a:rPr sz="1200" b="1" lang="ja-JP" altLang="en-US">
                 <a:solidFill>
                   <a:srgbClr val="262626"/>
                 </a:solidFill>
@@ -48737,7 +48737,7 @@
               <a:buNone/>
             </a:pPr>
             <a:r>
-              <a:rPr sz="1000" b="0">
+              <a:rPr sz="1000" b="0" lang="ja-JP" altLang="en-US">
                 <a:solidFill>
                   <a:srgbClr val="595959"/>
                 </a:solidFill>
@@ -48778,7 +48778,7 @@
               <a:buNone/>
             </a:pPr>
             <a:r>
-              <a:rPr sz="1200" b="1">
+              <a:rPr sz="1200" b="1" lang="ja-JP" altLang="en-US">
                 <a:solidFill>
                   <a:srgbClr val="262626"/>
                 </a:solidFill>
@@ -48794,7 +48794,7 @@
               <a:buNone/>
             </a:pPr>
             <a:r>
-              <a:rPr sz="1000" b="0">
+              <a:rPr sz="1000" b="0" lang="ja-JP" altLang="en-US">
                 <a:solidFill>
                   <a:srgbClr val="595959"/>
                 </a:solidFill>
@@ -48877,7 +48877,7 @@
               <a:buNone/>
             </a:pPr>
             <a:r>
-              <a:rPr sz="1000" b="1">
+              <a:rPr sz="1000" b="1" lang="ja-JP" altLang="en-US">
                 <a:solidFill>
                   <a:srgbClr val="FFFFFF"/>
                 </a:solidFill>
@@ -48944,7 +48944,7 @@
               <a:buNone/>
             </a:pPr>
             <a:r>
-              <a:rPr sz="1300" b="1">
+              <a:rPr sz="1300" b="1" lang="ja-JP" altLang="en-US">
                 <a:solidFill>
                   <a:srgbClr val="046A38"/>
                 </a:solidFill>
@@ -48983,7 +48983,7 @@
               <a:buNone/>
             </a:pPr>
             <a:r>
-              <a:rPr sz="1150" b="1">
+              <a:rPr sz="1150" b="1" lang="ja-JP" altLang="en-US">
                 <a:solidFill>
                   <a:srgbClr val="262626"/>
                 </a:solidFill>
@@ -49019,7 +49019,7 @@
               <a:buNone/>
             </a:pPr>
             <a:r>
-              <a:rPr sz="1000" b="0">
+              <a:rPr sz="1000" b="0" lang="ja-JP" altLang="en-US">
                 <a:solidFill>
                   <a:srgbClr val="595959"/>
                 </a:solidFill>
@@ -49064,7 +49064,7 @@
               <a:buNone/>
             </a:pPr>
             <a:r>
-              <a:rPr sz="900" b="1">
+              <a:rPr sz="900" b="1" lang="ja-JP" altLang="en-US">
                 <a:solidFill>
                   <a:srgbClr val="595959"/>
                 </a:solidFill>
@@ -49140,7 +49140,7 @@
               <a:buNone/>
             </a:pPr>
             <a:r>
-              <a:rPr sz="950" b="1">
+              <a:rPr sz="950" b="1" lang="ja-JP" altLang="en-US">
                 <a:solidFill>
                   <a:srgbClr val="FFFFFF"/>
                 </a:solidFill>
@@ -49207,7 +49207,7 @@
               <a:buNone/>
             </a:pPr>
             <a:r>
-              <a:rPr sz="1300" b="1">
+              <a:rPr sz="1300" b="1" lang="ja-JP" altLang="en-US">
                 <a:solidFill>
                   <a:srgbClr val="262626"/>
                 </a:solidFill>
@@ -49246,7 +49246,7 @@
               <a:buNone/>
             </a:pPr>
             <a:r>
-              <a:rPr sz="1150" b="1">
+              <a:rPr sz="1150" b="1" lang="ja-JP" altLang="en-US">
                 <a:solidFill>
                   <a:srgbClr val="262626"/>
                 </a:solidFill>
@@ -49282,7 +49282,7 @@
               <a:buNone/>
             </a:pPr>
             <a:r>
-              <a:rPr sz="1000" b="0">
+              <a:rPr sz="1000" b="0" lang="ja-JP" altLang="en-US">
                 <a:solidFill>
                   <a:srgbClr val="595959"/>
                 </a:solidFill>
@@ -49327,7 +49327,7 @@
               <a:buNone/>
             </a:pPr>
             <a:r>
-              <a:rPr sz="900" b="1">
+              <a:rPr sz="900" b="1" lang="ja-JP" altLang="en-US">
                 <a:solidFill>
                   <a:srgbClr val="595959"/>
                 </a:solidFill>
@@ -49427,7 +49427,7 @@
               <a:buNone/>
             </a:pPr>
             <a:r>
-              <a:rPr sz="1300" b="1">
+              <a:rPr sz="1300" b="1" lang="ja-JP" altLang="en-US">
                 <a:solidFill>
                   <a:srgbClr val="262626"/>
                 </a:solidFill>
@@ -49466,7 +49466,7 @@
               <a:buNone/>
             </a:pPr>
             <a:r>
-              <a:rPr sz="1150" b="1">
+              <a:rPr sz="1150" b="1" lang="ja-JP" altLang="en-US">
                 <a:solidFill>
                   <a:srgbClr val="262626"/>
                 </a:solidFill>
@@ -49511,7 +49511,7 @@
               <a:buNone/>
             </a:pPr>
             <a:r>
-              <a:rPr sz="900" b="1">
+              <a:rPr sz="900" b="1" lang="ja-JP" altLang="en-US">
                 <a:solidFill>
                   <a:srgbClr val="595959"/>
                 </a:solidFill>
@@ -49611,7 +49611,7 @@
               <a:buNone/>
             </a:pPr>
             <a:r>
-              <a:rPr sz="1300" b="1">
+              <a:rPr sz="1300" b="1" lang="ja-JP" altLang="en-US">
                 <a:solidFill>
                   <a:srgbClr val="046A38"/>
                 </a:solidFill>
@@ -49650,7 +49650,7 @@
               <a:buNone/>
             </a:pPr>
             <a:r>
-              <a:rPr sz="1150" b="1">
+              <a:rPr sz="1150" b="1" lang="ja-JP" altLang="en-US">
                 <a:solidFill>
                   <a:srgbClr val="262626"/>
                 </a:solidFill>
@@ -49686,7 +49686,7 @@
               <a:buNone/>
             </a:pPr>
             <a:r>
-              <a:rPr sz="1000" b="0">
+              <a:rPr sz="1000" b="0" lang="ja-JP" altLang="en-US">
                 <a:solidFill>
                   <a:srgbClr val="595959"/>
                 </a:solidFill>
@@ -49729,7 +49729,7 @@
               <a:buNone/>
             </a:pPr>
             <a:r>
-              <a:rPr sz="900" b="1">
+              <a:rPr sz="900" b="1" lang="ja-JP" altLang="en-US">
                 <a:solidFill>
                   <a:srgbClr val="FFFFFF"/>
                 </a:solidFill>
@@ -49831,7 +49831,7 @@
               <a:buNone/>
             </a:pPr>
             <a:r>
-              <a:rPr sz="1300" b="1">
+              <a:rPr sz="1300" b="1" lang="ja-JP" altLang="en-US">
                 <a:solidFill>
                   <a:srgbClr val="262626"/>
                 </a:solidFill>
@@ -49870,7 +49870,7 @@
               <a:buNone/>
             </a:pPr>
             <a:r>
-              <a:rPr sz="1150" b="1">
+              <a:rPr sz="1150" b="1" lang="ja-JP" altLang="en-US">
                 <a:solidFill>
                   <a:srgbClr val="262626"/>
                 </a:solidFill>
@@ -49906,7 +49906,7 @@
               <a:buNone/>
             </a:pPr>
             <a:r>
-              <a:rPr sz="1000" b="0">
+              <a:rPr sz="1000" b="0" lang="ja-JP" altLang="en-US">
                 <a:solidFill>
                   <a:srgbClr val="595959"/>
                 </a:solidFill>
@@ -50004,7 +50004,7 @@
               <a:buNone/>
             </a:pPr>
             <a:r>
-              <a:rPr sz="1300" b="1">
+              <a:rPr sz="1300" b="1" lang="ja-JP" altLang="en-US">
                 <a:solidFill>
                   <a:srgbClr val="046A38"/>
                 </a:solidFill>
@@ -50043,7 +50043,7 @@
               <a:buNone/>
             </a:pPr>
             <a:r>
-              <a:rPr sz="1150" b="1">
+              <a:rPr sz="1150" b="1" lang="ja-JP" altLang="en-US">
                 <a:solidFill>
                   <a:srgbClr val="262626"/>
                 </a:solidFill>
@@ -50079,7 +50079,7 @@
               <a:buNone/>
             </a:pPr>
             <a:r>
-              <a:rPr sz="1000" b="0">
+              <a:rPr sz="1000" b="0" lang="ja-JP" altLang="en-US">
                 <a:solidFill>
                   <a:srgbClr val="595959"/>
                 </a:solidFill>
@@ -50181,7 +50181,7 @@
               <a:buNone/>
             </a:pPr>
             <a:r>
-              <a:rPr sz="1300" b="1">
+              <a:rPr sz="1300" b="1" lang="ja-JP" altLang="en-US">
                 <a:solidFill>
                   <a:srgbClr val="262626"/>
                 </a:solidFill>
@@ -50220,7 +50220,7 @@
               <a:buNone/>
             </a:pPr>
             <a:r>
-              <a:rPr sz="1150" b="1">
+              <a:rPr sz="1150" b="1" lang="ja-JP" altLang="en-US">
                 <a:solidFill>
                   <a:srgbClr val="262626"/>
                 </a:solidFill>
@@ -50256,7 +50256,7 @@
               <a:buNone/>
             </a:pPr>
             <a:r>
-              <a:rPr sz="1000" b="0">
+              <a:rPr sz="1000" b="0" lang="ja-JP" altLang="en-US">
                 <a:solidFill>
                   <a:srgbClr val="595959"/>
                 </a:solidFill>
@@ -50325,7 +50325,7 @@
               <a:buNone/>
             </a:pPr>
             <a:r>
-              <a:rPr sz="1250" b="1">
+              <a:rPr sz="1250" b="1" lang="ja-JP" altLang="en-US">
                 <a:solidFill>
                   <a:srgbClr val="262626"/>
                 </a:solidFill>
@@ -50361,7 +50361,7 @@
               <a:buNone/>
             </a:pPr>
             <a:r>
-              <a:rPr sz="1200" b="1">
+              <a:rPr sz="1200" b="1" lang="ja-JP" altLang="en-US">
                 <a:solidFill>
                   <a:srgbClr val="046A38"/>
                 </a:solidFill>
@@ -50369,7 +50369,7 @@
               <a:t>前倒し　</a:t>
             </a:r>
             <a:r>
-              <a:rPr sz="1200" b="0">
+              <a:rPr sz="1200" b="0" lang="ja-JP" altLang="en-US">
                 <a:solidFill>
                   <a:srgbClr val="262626"/>
                 </a:solidFill>
@@ -50385,7 +50385,7 @@
               <a:buNone/>
             </a:pPr>
             <a:r>
-              <a:rPr sz="1200" b="1">
+              <a:rPr sz="1200" b="1" lang="ja-JP" altLang="en-US">
                 <a:solidFill>
                   <a:srgbClr val="046A38"/>
                 </a:solidFill>
@@ -50393,7 +50393,7 @@
               <a:t>区切り　</a:t>
             </a:r>
             <a:r>
-              <a:rPr sz="1200" b="0">
+              <a:rPr sz="1200" b="0" lang="ja-JP" altLang="en-US">
                 <a:solidFill>
                   <a:srgbClr val="262626"/>
                 </a:solidFill>
@@ -50409,7 +50409,7 @@
               <a:buNone/>
             </a:pPr>
             <a:r>
-              <a:rPr sz="1200" b="1">
+              <a:rPr sz="1200" b="1" lang="ja-JP" altLang="en-US">
                 <a:solidFill>
                   <a:srgbClr val="046A38"/>
                 </a:solidFill>
@@ -50417,7 +50417,7 @@
               <a:t>移行　　</a:t>
             </a:r>
             <a:r>
-              <a:rPr sz="1200" b="0">
+              <a:rPr sz="1200" b="0" lang="ja-JP" altLang="en-US">
                 <a:solidFill>
                   <a:srgbClr val="262626"/>
                 </a:solidFill>
@@ -50614,7 +50614,7 @@
               <a:buNone/>
             </a:pPr>
             <a:r>
-              <a:rPr sz="1250" b="1">
+              <a:rPr sz="1250" b="1" lang="ja-JP" altLang="en-US">
                 <a:solidFill>
                   <a:srgbClr val="FFFFFF"/>
                 </a:solidFill>
@@ -50650,7 +50650,7 @@
               <a:buNone/>
             </a:pPr>
             <a:r>
-              <a:rPr sz="1350" b="1">
+              <a:rPr sz="1350" b="1" lang="ja-JP" altLang="en-US">
                 <a:solidFill>
                   <a:srgbClr val="262626"/>
                 </a:solidFill>
@@ -50696,7 +50696,7 @@
               <a:buChar char="•"/>
             </a:pPr>
             <a:r>
-              <a:rPr sz="1150" b="0">
+              <a:rPr sz="1150" b="0" lang="ja-JP" altLang="en-US">
                 <a:solidFill>
                   <a:srgbClr val="262626"/>
                 </a:solidFill>
@@ -50739,7 +50739,7 @@
               <a:buNone/>
             </a:pPr>
             <a:r>
-              <a:rPr sz="1250" b="1">
+              <a:rPr sz="1250" b="1" lang="ja-JP" altLang="en-US">
                 <a:solidFill>
                   <a:srgbClr val="FFFFFF"/>
                 </a:solidFill>
@@ -50775,7 +50775,7 @@
               <a:buNone/>
             </a:pPr>
             <a:r>
-              <a:rPr sz="1350" b="1">
+              <a:rPr sz="1350" b="1" lang="ja-JP" altLang="en-US">
                 <a:solidFill>
                   <a:srgbClr val="262626"/>
                 </a:solidFill>
@@ -50821,7 +50821,7 @@
               <a:buChar char="•"/>
             </a:pPr>
             <a:r>
-              <a:rPr sz="1150" b="1">
+              <a:rPr sz="1150" b="1" lang="ja-JP" altLang="en-US">
                 <a:solidFill>
                   <a:srgbClr val="262626"/>
                 </a:solidFill>
@@ -50829,7 +50829,7 @@
               <a:t>第1回（今週）</a:t>
             </a:r>
             <a:r>
-              <a:rPr sz="1150" b="0">
+              <a:rPr sz="1150" b="0" lang="ja-JP" altLang="en-US">
                 <a:solidFill>
                   <a:srgbClr val="262626"/>
                 </a:solidFill>
@@ -50852,7 +50852,7 @@
               <a:buChar char="•"/>
             </a:pPr>
             <a:r>
-              <a:rPr sz="1150" b="1">
+              <a:rPr sz="1150" b="1" lang="ja-JP" altLang="en-US">
                 <a:solidFill>
                   <a:srgbClr val="262626"/>
                 </a:solidFill>
@@ -50860,7 +50860,7 @@
               <a:t>第2回（来週）</a:t>
             </a:r>
             <a:r>
-              <a:rPr sz="1150" b="0">
+              <a:rPr sz="1150" b="0" lang="ja-JP" altLang="en-US">
                 <a:solidFill>
                   <a:srgbClr val="262626"/>
                 </a:solidFill>
@@ -50903,7 +50903,7 @@
               <a:buNone/>
             </a:pPr>
             <a:r>
-              <a:rPr sz="1250" b="1">
+              <a:rPr sz="1250" b="1" lang="ja-JP" altLang="en-US">
                 <a:solidFill>
                   <a:srgbClr val="FFFFFF"/>
                 </a:solidFill>
@@ -50939,7 +50939,7 @@
               <a:buNone/>
             </a:pPr>
             <a:r>
-              <a:rPr sz="1350" b="1">
+              <a:rPr sz="1350" b="1" lang="ja-JP" altLang="en-US">
                 <a:solidFill>
                   <a:srgbClr val="262626"/>
                 </a:solidFill>
@@ -50985,7 +50985,7 @@
               <a:buChar char="•"/>
             </a:pPr>
             <a:r>
-              <a:rPr sz="1150" b="0">
+              <a:rPr sz="1150" b="0" lang="ja-JP" altLang="en-US">
                 <a:solidFill>
                   <a:srgbClr val="262626"/>
                 </a:solidFill>
@@ -51026,7 +51026,7 @@
               <a:buNone/>
             </a:pPr>
             <a:r>
-              <a:rPr sz="1250" b="1">
+              <a:rPr sz="1250" b="1" lang="ja-JP" altLang="en-US">
                 <a:solidFill>
                   <a:srgbClr val="FFFFFF"/>
                 </a:solidFill>
@@ -51071,7 +51071,7 @@
                         <a:buNone/>
                       </a:pPr>
                       <a:r>
-                        <a:rPr sz="1100" b="1">
+                        <a:rPr sz="1100" b="1" lang="ja-JP" altLang="en-US">
                           <a:solidFill>
                             <a:srgbClr val="262626"/>
                           </a:solidFill>
@@ -51110,7 +51110,7 @@
                         <a:buNone/>
                       </a:pPr>
                       <a:r>
-                        <a:rPr sz="1100" b="0">
+                        <a:rPr sz="1100" b="0" lang="ja-JP" altLang="en-US">
                           <a:solidFill>
                             <a:srgbClr val="1A1A1A"/>
                           </a:solidFill>
@@ -51151,7 +51151,7 @@
                         <a:buNone/>
                       </a:pPr>
                       <a:r>
-                        <a:rPr sz="1100" b="1">
+                        <a:rPr sz="1100" b="1" lang="ja-JP" altLang="en-US">
                           <a:solidFill>
                             <a:srgbClr val="262626"/>
                           </a:solidFill>
@@ -51190,7 +51190,7 @@
                         <a:buNone/>
                       </a:pPr>
                       <a:r>
-                        <a:rPr sz="1100" b="0">
+                        <a:rPr sz="1100" b="0" lang="ja-JP" altLang="en-US">
                           <a:solidFill>
                             <a:srgbClr val="1A1A1A"/>
                           </a:solidFill>
@@ -51231,7 +51231,7 @@
                         <a:buNone/>
                       </a:pPr>
                       <a:r>
-                        <a:rPr sz="1100" b="1">
+                        <a:rPr sz="1100" b="1" lang="ja-JP" altLang="en-US">
                           <a:solidFill>
                             <a:srgbClr val="262626"/>
                           </a:solidFill>
@@ -51270,7 +51270,7 @@
                         <a:buNone/>
                       </a:pPr>
                       <a:r>
-                        <a:rPr sz="1100" b="0">
+                        <a:rPr sz="1100" b="0" lang="ja-JP" altLang="en-US">
                           <a:solidFill>
                             <a:srgbClr val="1A1A1A"/>
                           </a:solidFill>
@@ -51311,7 +51311,7 @@
                         <a:buNone/>
                       </a:pPr>
                       <a:r>
-                        <a:rPr sz="1100" b="1">
+                        <a:rPr sz="1100" b="1" lang="ja-JP" altLang="en-US">
                           <a:solidFill>
                             <a:srgbClr val="262626"/>
                           </a:solidFill>
@@ -51350,7 +51350,7 @@
                         <a:buNone/>
                       </a:pPr>
                       <a:r>
-                        <a:rPr sz="1100" b="0">
+                        <a:rPr sz="1100" b="0" lang="ja-JP" altLang="en-US">
                           <a:solidFill>
                             <a:srgbClr val="1A1A1A"/>
                           </a:solidFill>
@@ -51413,7 +51413,7 @@
               <a:buNone/>
             </a:pPr>
             <a:r>
-              <a:rPr sz="1250" b="1">
+              <a:rPr sz="1250" b="1" lang="ja-JP" altLang="en-US">
                 <a:solidFill>
                   <a:srgbClr val="FFFFFF"/>
                 </a:solidFill>
@@ -51456,7 +51456,7 @@
               <a:buNone/>
             </a:pPr>
             <a:r>
-              <a:rPr sz="1100" b="1">
+              <a:rPr sz="1100" b="1" lang="ja-JP" altLang="en-US">
                 <a:solidFill>
                   <a:srgbClr val="262626"/>
                 </a:solidFill>
@@ -51492,7 +51492,7 @@
               <a:buNone/>
             </a:pPr>
             <a:r>
-              <a:rPr sz="1100" b="0">
+              <a:rPr sz="1100" b="0" lang="ja-JP" altLang="en-US">
                 <a:solidFill>
                   <a:srgbClr val="262626"/>
                 </a:solidFill>
@@ -51556,7 +51556,7 @@
               <a:buNone/>
             </a:pPr>
             <a:r>
-              <a:rPr sz="1100" b="1">
+              <a:rPr sz="1100" b="1" lang="ja-JP" altLang="en-US">
                 <a:solidFill>
                   <a:srgbClr val="262626"/>
                 </a:solidFill>
@@ -51592,7 +51592,7 @@
               <a:buNone/>
             </a:pPr>
             <a:r>
-              <a:rPr sz="1100" b="0">
+              <a:rPr sz="1100" b="0" lang="ja-JP" altLang="en-US">
                 <a:solidFill>
                   <a:srgbClr val="262626"/>
                 </a:solidFill>
@@ -51656,7 +51656,7 @@
               <a:buNone/>
             </a:pPr>
             <a:r>
-              <a:rPr sz="1100" b="1">
+              <a:rPr sz="1100" b="1" lang="ja-JP" altLang="en-US">
                 <a:solidFill>
                   <a:srgbClr val="262626"/>
                 </a:solidFill>
@@ -51692,7 +51692,7 @@
               <a:buNone/>
             </a:pPr>
             <a:r>
-              <a:rPr sz="1100" b="0">
+              <a:rPr sz="1100" b="0" lang="ja-JP" altLang="en-US">
                 <a:solidFill>
                   <a:srgbClr val="262626"/>
                 </a:solidFill>
@@ -51754,7 +51754,7 @@
               <a:buNone/>
             </a:pPr>
             <a:r>
-              <a:rPr sz="1200" b="1">
+              <a:rPr sz="1200" b="1" lang="ja-JP" altLang="en-US">
                 <a:solidFill>
                   <a:srgbClr val="046A38"/>
                 </a:solidFill>
@@ -51770,7 +51770,7 @@
               <a:buNone/>
             </a:pPr>
             <a:r>
-              <a:rPr sz="1050" b="0">
+              <a:rPr sz="1050" b="0" lang="ja-JP" altLang="en-US">
                 <a:solidFill>
                   <a:srgbClr val="262626"/>
                 </a:solidFill>
@@ -51965,7 +51965,7 @@
               <a:buNone/>
             </a:pPr>
             <a:r>
-              <a:rPr sz="1250" b="1">
+              <a:rPr sz="1250" b="1" lang="ja-JP" altLang="en-US">
                 <a:solidFill>
                   <a:srgbClr val="262626"/>
                 </a:solidFill>
@@ -52010,7 +52010,7 @@
                         <a:buNone/>
                       </a:pPr>
                       <a:r>
-                        <a:rPr sz="1200" b="0">
+                        <a:rPr sz="1200" b="0" lang="ja-JP" altLang="en-US">
                           <a:solidFill>
                             <a:srgbClr val="595959"/>
                           </a:solidFill>
@@ -52049,7 +52049,7 @@
                         <a:buNone/>
                       </a:pPr>
                       <a:r>
-                        <a:rPr sz="1200" b="0">
+                        <a:rPr sz="1200" b="0" lang="ja-JP" altLang="en-US">
                           <a:solidFill>
                             <a:srgbClr val="1A1A1A"/>
                           </a:solidFill>
@@ -52090,7 +52090,7 @@
                         <a:buNone/>
                       </a:pPr>
                       <a:r>
-                        <a:rPr sz="1200" b="0">
+                        <a:rPr sz="1200" b="0" lang="ja-JP" altLang="en-US">
                           <a:solidFill>
                             <a:srgbClr val="595959"/>
                           </a:solidFill>
@@ -52129,7 +52129,7 @@
                         <a:buNone/>
                       </a:pPr>
                       <a:r>
-                        <a:rPr sz="1200" b="0">
+                        <a:rPr sz="1200" b="0" lang="ja-JP" altLang="en-US">
                           <a:solidFill>
                             <a:srgbClr val="1A1A1A"/>
                           </a:solidFill>
@@ -52170,7 +52170,7 @@
                         <a:buNone/>
                       </a:pPr>
                       <a:r>
-                        <a:rPr sz="1200" b="0">
+                        <a:rPr sz="1200" b="0" lang="ja-JP" altLang="en-US">
                           <a:solidFill>
                             <a:srgbClr val="595959"/>
                           </a:solidFill>
@@ -52209,7 +52209,7 @@
                         <a:buNone/>
                       </a:pPr>
                       <a:r>
-                        <a:rPr sz="1200" b="0">
+                        <a:rPr sz="1200" b="0" lang="ja-JP" altLang="en-US">
                           <a:solidFill>
                             <a:srgbClr val="1A1A1A"/>
                           </a:solidFill>
@@ -52272,7 +52272,7 @@
               <a:buNone/>
             </a:pPr>
             <a:r>
-              <a:rPr sz="1250" b="1">
+              <a:rPr sz="1250" b="1" lang="ja-JP" altLang="en-US">
                 <a:solidFill>
                   <a:srgbClr val="262626"/>
                 </a:solidFill>
@@ -52319,7 +52319,7 @@
                         <a:buNone/>
                       </a:pPr>
                       <a:r>
-                        <a:rPr sz="1150" b="1">
+                        <a:rPr sz="1150" b="1" lang="ja-JP" altLang="en-US">
                           <a:solidFill>
                             <a:srgbClr val="FFFFFF"/>
                           </a:solidFill>
@@ -52360,7 +52360,7 @@
                         <a:buNone/>
                       </a:pPr>
                       <a:r>
-                        <a:rPr sz="1150" b="1">
+                        <a:rPr sz="1150" b="1" lang="ja-JP" altLang="en-US">
                           <a:solidFill>
                             <a:srgbClr val="FFFFFF"/>
                           </a:solidFill>
@@ -52401,7 +52401,7 @@
                         <a:buNone/>
                       </a:pPr>
                       <a:r>
-                        <a:rPr sz="1150" b="1">
+                        <a:rPr sz="1150" b="1" lang="ja-JP" altLang="en-US">
                           <a:solidFill>
                             <a:srgbClr val="FFFFFF"/>
                           </a:solidFill>
@@ -52442,7 +52442,7 @@
                         <a:buNone/>
                       </a:pPr>
                       <a:r>
-                        <a:rPr sz="1150" b="1">
+                        <a:rPr sz="1150" b="1" lang="ja-JP" altLang="en-US">
                           <a:solidFill>
                             <a:srgbClr val="FFFFFF"/>
                           </a:solidFill>
@@ -52485,7 +52485,7 @@
                         <a:buNone/>
                       </a:pPr>
                       <a:r>
-                        <a:rPr sz="1200" b="0">
+                        <a:rPr sz="1200" b="0" lang="ja-JP" altLang="en-US">
                           <a:solidFill>
                             <a:srgbClr val="1A1A1A"/>
                           </a:solidFill>
@@ -52524,7 +52524,7 @@
                         <a:buNone/>
                       </a:pPr>
                       <a:r>
-                        <a:rPr sz="1200" b="0">
+                        <a:rPr sz="1200" b="0" lang="ja-JP" altLang="en-US">
                           <a:solidFill>
                             <a:srgbClr val="1A1A1A"/>
                           </a:solidFill>
@@ -52563,7 +52563,7 @@
                         <a:buNone/>
                       </a:pPr>
                       <a:r>
-                        <a:rPr sz="1200" b="0">
+                        <a:rPr sz="1200" b="0" lang="ja-JP" altLang="en-US">
                           <a:solidFill>
                             <a:srgbClr val="1A1A1A"/>
                           </a:solidFill>
@@ -52602,7 +52602,7 @@
                         <a:buNone/>
                       </a:pPr>
                       <a:r>
-                        <a:rPr sz="1200" b="0">
+                        <a:rPr sz="1200" b="0" lang="ja-JP" altLang="en-US">
                           <a:solidFill>
                             <a:srgbClr val="1A1A1A"/>
                           </a:solidFill>
@@ -52643,7 +52643,7 @@
                         <a:buNone/>
                       </a:pPr>
                       <a:r>
-                        <a:rPr sz="1200" b="0">
+                        <a:rPr sz="1200" b="0" lang="ja-JP" altLang="en-US">
                           <a:solidFill>
                             <a:srgbClr val="1A1A1A"/>
                           </a:solidFill>
@@ -52682,7 +52682,7 @@
                         <a:buNone/>
                       </a:pPr>
                       <a:r>
-                        <a:rPr sz="1200" b="0">
+                        <a:rPr sz="1200" b="0" lang="ja-JP" altLang="en-US">
                           <a:solidFill>
                             <a:srgbClr val="1A1A1A"/>
                           </a:solidFill>
@@ -52721,7 +52721,7 @@
                         <a:buNone/>
                       </a:pPr>
                       <a:r>
-                        <a:rPr sz="1200" b="0">
+                        <a:rPr sz="1200" b="0" lang="ja-JP" altLang="en-US">
                           <a:solidFill>
                             <a:srgbClr val="1A1A1A"/>
                           </a:solidFill>
@@ -52760,7 +52760,7 @@
                         <a:buNone/>
                       </a:pPr>
                       <a:r>
-                        <a:rPr sz="1200" b="0">
+                        <a:rPr sz="1200" b="0" lang="ja-JP" altLang="en-US">
                           <a:solidFill>
                             <a:srgbClr val="1A1A1A"/>
                           </a:solidFill>
@@ -52801,7 +52801,7 @@
                         <a:buNone/>
                       </a:pPr>
                       <a:r>
-                        <a:rPr sz="1200" b="0">
+                        <a:rPr sz="1200" b="0" lang="ja-JP" altLang="en-US">
                           <a:solidFill>
                             <a:srgbClr val="1A1A1A"/>
                           </a:solidFill>
@@ -52840,7 +52840,7 @@
                         <a:buNone/>
                       </a:pPr>
                       <a:r>
-                        <a:rPr sz="1200" b="0">
+                        <a:rPr sz="1200" b="0" lang="ja-JP" altLang="en-US">
                           <a:solidFill>
                             <a:srgbClr val="1A1A1A"/>
                           </a:solidFill>
@@ -52879,7 +52879,7 @@
                         <a:buNone/>
                       </a:pPr>
                       <a:r>
-                        <a:rPr sz="1200" b="0">
+                        <a:rPr sz="1200" b="0" lang="ja-JP" altLang="en-US">
                           <a:solidFill>
                             <a:srgbClr val="1A1A1A"/>
                           </a:solidFill>
@@ -52918,7 +52918,7 @@
                         <a:buNone/>
                       </a:pPr>
                       <a:r>
-                        <a:rPr sz="1200" b="0">
+                        <a:rPr sz="1200" b="0" lang="ja-JP" altLang="en-US">
                           <a:solidFill>
                             <a:srgbClr val="1A1A1A"/>
                           </a:solidFill>
@@ -52959,7 +52959,7 @@
                         <a:buNone/>
                       </a:pPr>
                       <a:r>
-                        <a:rPr sz="1200" b="0">
+                        <a:rPr sz="1200" b="0" lang="ja-JP" altLang="en-US">
                           <a:solidFill>
                             <a:srgbClr val="1A1A1A"/>
                           </a:solidFill>
@@ -52998,7 +52998,7 @@
                         <a:buNone/>
                       </a:pPr>
                       <a:r>
-                        <a:rPr sz="1200" b="0">
+                        <a:rPr sz="1200" b="0" lang="ja-JP" altLang="en-US">
                           <a:solidFill>
                             <a:srgbClr val="1A1A1A"/>
                           </a:solidFill>
@@ -53037,7 +53037,7 @@
                         <a:buNone/>
                       </a:pPr>
                       <a:r>
-                        <a:rPr sz="1200" b="0">
+                        <a:rPr sz="1200" b="0" lang="ja-JP" altLang="en-US">
                           <a:solidFill>
                             <a:srgbClr val="1A1A1A"/>
                           </a:solidFill>
@@ -53076,7 +53076,7 @@
                         <a:buNone/>
                       </a:pPr>
                       <a:r>
-                        <a:rPr sz="1200" b="0">
+                        <a:rPr sz="1200" b="0" lang="ja-JP" altLang="en-US">
                           <a:solidFill>
                             <a:srgbClr val="1A1A1A"/>
                           </a:solidFill>
@@ -53117,7 +53117,7 @@
                         <a:buNone/>
                       </a:pPr>
                       <a:r>
-                        <a:rPr sz="1200" b="0">
+                        <a:rPr sz="1200" b="0" lang="ja-JP" altLang="en-US">
                           <a:solidFill>
                             <a:srgbClr val="1A1A1A"/>
                           </a:solidFill>
@@ -53156,7 +53156,7 @@
                         <a:buNone/>
                       </a:pPr>
                       <a:r>
-                        <a:rPr sz="1200" b="0">
+                        <a:rPr sz="1200" b="0" lang="ja-JP" altLang="en-US">
                           <a:solidFill>
                             <a:srgbClr val="1A1A1A"/>
                           </a:solidFill>
@@ -53195,7 +53195,7 @@
                         <a:buNone/>
                       </a:pPr>
                       <a:r>
-                        <a:rPr sz="1200" b="0">
+                        <a:rPr sz="1200" b="0" lang="ja-JP" altLang="en-US">
                           <a:solidFill>
                             <a:srgbClr val="1A1A1A"/>
                           </a:solidFill>
@@ -53234,7 +53234,7 @@
                         <a:buNone/>
                       </a:pPr>
                       <a:r>
-                        <a:rPr sz="1200" b="0">
+                        <a:rPr sz="1200" b="0" lang="ja-JP" altLang="en-US">
                           <a:solidFill>
                             <a:srgbClr val="1A1A1A"/>
                           </a:solidFill>
